--- a/2_MRIO/Visualisation/2. Sankeys/4_Figure_1/Figure_1.pptx
+++ b/2_MRIO/Visualisation/2. Sankeys/4_Figure_1/Figure_1.pptx
@@ -115,7 +115,7 @@
 <file path=ppt/revisionInfo.xml><?xml version="1.0" encoding="utf-8"?>
 <p1510:revInfo xmlns:a="http://schemas.openxmlformats.org/drawingml/2006/main" xmlns:r="http://schemas.openxmlformats.org/officeDocument/2006/relationships" xmlns:p1510="http://schemas.microsoft.com/office/powerpoint/2015/10/main">
   <p1510:revLst>
-    <p1510:client id="{1A933708-1315-4741-9787-57CA6A1E78DD}" v="2" dt="2024-12-09T10:03:09.805"/>
+    <p1510:client id="{21A93A88-B6C4-4C8E-AEE5-72269DDFD9FF}" v="36" dt="2025-12-17T02:41:46.200"/>
   </p1510:revLst>
 </p1510:revInfo>
 </file>
@@ -123,34 +123,466 @@
 <file path=ppt/changesInfos/changesInfo1.xml><?xml version="1.0" encoding="utf-8"?>
 <pc:chgInfo xmlns:a="http://schemas.openxmlformats.org/drawingml/2006/main" xmlns:r="http://schemas.openxmlformats.org/officeDocument/2006/relationships" xmlns:ac="http://schemas.microsoft.com/office/drawing/2013/main/command" xmlns:pc="http://schemas.microsoft.com/office/powerpoint/2013/main/command">
   <pc:docChgLst>
-    <pc:chgData name="Etienne Charles Berthet" userId="fb84f994-9c36-4b6d-a860-d65119d4ff72" providerId="ADAL" clId="{1A933708-1315-4741-9787-57CA6A1E78DD}"/>
-    <pc:docChg chg="custSel modSld">
-      <pc:chgData name="Etienne Charles Berthet" userId="fb84f994-9c36-4b6d-a860-d65119d4ff72" providerId="ADAL" clId="{1A933708-1315-4741-9787-57CA6A1E78DD}" dt="2024-12-09T18:15:08.825" v="25" actId="478"/>
+    <pc:chgData name="Etienne Berthet" userId="b87b9fbd-ebe0-40b1-80a1-0443c4f6f4de" providerId="ADAL" clId="{6B8AEB68-E4F9-4E25-8803-C4FAF66D4D7B}"/>
+    <pc:docChg chg="undo custSel modSld">
+      <pc:chgData name="Etienne Berthet" userId="b87b9fbd-ebe0-40b1-80a1-0443c4f6f4de" providerId="ADAL" clId="{6B8AEB68-E4F9-4E25-8803-C4FAF66D4D7B}" dt="2025-12-17T02:41:46.200" v="632" actId="164"/>
       <pc:docMkLst>
         <pc:docMk/>
       </pc:docMkLst>
       <pc:sldChg chg="addSp delSp modSp mod">
-        <pc:chgData name="Etienne Charles Berthet" userId="fb84f994-9c36-4b6d-a860-d65119d4ff72" providerId="ADAL" clId="{1A933708-1315-4741-9787-57CA6A1E78DD}" dt="2024-12-09T18:15:08.825" v="25" actId="478"/>
+        <pc:chgData name="Etienne Berthet" userId="b87b9fbd-ebe0-40b1-80a1-0443c4f6f4de" providerId="ADAL" clId="{6B8AEB68-E4F9-4E25-8803-C4FAF66D4D7B}" dt="2025-12-17T02:41:46.200" v="632" actId="164"/>
         <pc:sldMkLst>
           <pc:docMk/>
           <pc:sldMk cId="4117449452" sldId="257"/>
         </pc:sldMkLst>
+        <pc:spChg chg="mod ord">
+          <ac:chgData name="Etienne Berthet" userId="b87b9fbd-ebe0-40b1-80a1-0443c4f6f4de" providerId="ADAL" clId="{6B8AEB68-E4F9-4E25-8803-C4FAF66D4D7B}" dt="2025-12-17T02:41:46.200" v="632" actId="164"/>
+          <ac:spMkLst>
+            <pc:docMk/>
+            <pc:sldMk cId="4117449452" sldId="257"/>
+            <ac:spMk id="14" creationId="{FA36933E-B0E1-3900-0466-73B39E941941}"/>
+          </ac:spMkLst>
+        </pc:spChg>
+        <pc:spChg chg="del mod">
+          <ac:chgData name="Etienne Berthet" userId="b87b9fbd-ebe0-40b1-80a1-0443c4f6f4de" providerId="ADAL" clId="{6B8AEB68-E4F9-4E25-8803-C4FAF66D4D7B}" dt="2025-12-17T02:37:55.071" v="499" actId="478"/>
+          <ac:spMkLst>
+            <pc:docMk/>
+            <pc:sldMk cId="4117449452" sldId="257"/>
+            <ac:spMk id="18" creationId="{6E8C9F97-CE20-011D-2BC5-83FAA905A304}"/>
+          </ac:spMkLst>
+        </pc:spChg>
+        <pc:spChg chg="mod ord">
+          <ac:chgData name="Etienne Berthet" userId="b87b9fbd-ebe0-40b1-80a1-0443c4f6f4de" providerId="ADAL" clId="{6B8AEB68-E4F9-4E25-8803-C4FAF66D4D7B}" dt="2025-12-17T02:41:46.200" v="632" actId="164"/>
+          <ac:spMkLst>
+            <pc:docMk/>
+            <pc:sldMk cId="4117449452" sldId="257"/>
+            <ac:spMk id="19" creationId="{2FD602B3-168B-A9C2-6E32-9AD219E43660}"/>
+          </ac:spMkLst>
+        </pc:spChg>
+        <pc:spChg chg="mod">
+          <ac:chgData name="Etienne Berthet" userId="b87b9fbd-ebe0-40b1-80a1-0443c4f6f4de" providerId="ADAL" clId="{6B8AEB68-E4F9-4E25-8803-C4FAF66D4D7B}" dt="2025-12-17T02:41:46.200" v="632" actId="164"/>
+          <ac:spMkLst>
+            <pc:docMk/>
+            <pc:sldMk cId="4117449452" sldId="257"/>
+            <ac:spMk id="20" creationId="{8D1195AE-83FD-14A8-56BD-022E9EF726DE}"/>
+          </ac:spMkLst>
+        </pc:spChg>
+        <pc:spChg chg="del mod">
+          <ac:chgData name="Etienne Berthet" userId="b87b9fbd-ebe0-40b1-80a1-0443c4f6f4de" providerId="ADAL" clId="{6B8AEB68-E4F9-4E25-8803-C4FAF66D4D7B}" dt="2025-12-17T02:40:48.064" v="610" actId="478"/>
+          <ac:spMkLst>
+            <pc:docMk/>
+            <pc:sldMk cId="4117449452" sldId="257"/>
+            <ac:spMk id="21" creationId="{2CC6E9FD-1BCF-F001-8DBE-9247D46D440E}"/>
+          </ac:spMkLst>
+        </pc:spChg>
+        <pc:spChg chg="del mod">
+          <ac:chgData name="Etienne Berthet" userId="b87b9fbd-ebe0-40b1-80a1-0443c4f6f4de" providerId="ADAL" clId="{6B8AEB68-E4F9-4E25-8803-C4FAF66D4D7B}" dt="2025-12-17T02:40:48.064" v="610" actId="478"/>
+          <ac:spMkLst>
+            <pc:docMk/>
+            <pc:sldMk cId="4117449452" sldId="257"/>
+            <ac:spMk id="22" creationId="{FAF3E675-8EF8-5798-0CF2-D40C3B51DB5B}"/>
+          </ac:spMkLst>
+        </pc:spChg>
+        <pc:spChg chg="del">
+          <ac:chgData name="Etienne Berthet" userId="b87b9fbd-ebe0-40b1-80a1-0443c4f6f4de" providerId="ADAL" clId="{6B8AEB68-E4F9-4E25-8803-C4FAF66D4D7B}" dt="2025-12-17T00:54:56.265" v="0" actId="478"/>
+          <ac:spMkLst>
+            <pc:docMk/>
+            <pc:sldMk cId="4117449452" sldId="257"/>
+            <ac:spMk id="23" creationId="{35805BB0-ABE7-FA99-7821-C333D9E4D10D}"/>
+          </ac:spMkLst>
+        </pc:spChg>
+        <pc:spChg chg="del">
+          <ac:chgData name="Etienne Berthet" userId="b87b9fbd-ebe0-40b1-80a1-0443c4f6f4de" providerId="ADAL" clId="{6B8AEB68-E4F9-4E25-8803-C4FAF66D4D7B}" dt="2025-12-17T00:54:56.265" v="0" actId="478"/>
+          <ac:spMkLst>
+            <pc:docMk/>
+            <pc:sldMk cId="4117449452" sldId="257"/>
+            <ac:spMk id="24" creationId="{F991E1B7-056F-C162-148E-C403668E8209}"/>
+          </ac:spMkLst>
+        </pc:spChg>
+        <pc:spChg chg="del">
+          <ac:chgData name="Etienne Berthet" userId="b87b9fbd-ebe0-40b1-80a1-0443c4f6f4de" providerId="ADAL" clId="{6B8AEB68-E4F9-4E25-8803-C4FAF66D4D7B}" dt="2025-12-17T00:54:56.265" v="0" actId="478"/>
+          <ac:spMkLst>
+            <pc:docMk/>
+            <pc:sldMk cId="4117449452" sldId="257"/>
+            <ac:spMk id="26" creationId="{30581DAC-3F7C-BF52-6904-E00725549857}"/>
+          </ac:spMkLst>
+        </pc:spChg>
+        <pc:spChg chg="del">
+          <ac:chgData name="Etienne Berthet" userId="b87b9fbd-ebe0-40b1-80a1-0443c4f6f4de" providerId="ADAL" clId="{6B8AEB68-E4F9-4E25-8803-C4FAF66D4D7B}" dt="2025-12-17T00:54:56.265" v="0" actId="478"/>
+          <ac:spMkLst>
+            <pc:docMk/>
+            <pc:sldMk cId="4117449452" sldId="257"/>
+            <ac:spMk id="27" creationId="{03C29CE9-5061-276A-A0D4-C0ABA7448BCA}"/>
+          </ac:spMkLst>
+        </pc:spChg>
+        <pc:spChg chg="del">
+          <ac:chgData name="Etienne Berthet" userId="b87b9fbd-ebe0-40b1-80a1-0443c4f6f4de" providerId="ADAL" clId="{6B8AEB68-E4F9-4E25-8803-C4FAF66D4D7B}" dt="2025-12-17T00:54:56.265" v="0" actId="478"/>
+          <ac:spMkLst>
+            <pc:docMk/>
+            <pc:sldMk cId="4117449452" sldId="257"/>
+            <ac:spMk id="29" creationId="{4F7874FA-1E27-FFDA-C744-2C8CCF671A78}"/>
+          </ac:spMkLst>
+        </pc:spChg>
+        <pc:spChg chg="del">
+          <ac:chgData name="Etienne Berthet" userId="b87b9fbd-ebe0-40b1-80a1-0443c4f6f4de" providerId="ADAL" clId="{6B8AEB68-E4F9-4E25-8803-C4FAF66D4D7B}" dt="2025-12-17T00:54:56.265" v="0" actId="478"/>
+          <ac:spMkLst>
+            <pc:docMk/>
+            <pc:sldMk cId="4117449452" sldId="257"/>
+            <ac:spMk id="30" creationId="{570E5B45-3AEB-1581-FF89-B2824E585CDA}"/>
+          </ac:spMkLst>
+        </pc:spChg>
+        <pc:spChg chg="del">
+          <ac:chgData name="Etienne Berthet" userId="b87b9fbd-ebe0-40b1-80a1-0443c4f6f4de" providerId="ADAL" clId="{6B8AEB68-E4F9-4E25-8803-C4FAF66D4D7B}" dt="2025-12-17T00:54:56.265" v="0" actId="478"/>
+          <ac:spMkLst>
+            <pc:docMk/>
+            <pc:sldMk cId="4117449452" sldId="257"/>
+            <ac:spMk id="31" creationId="{0D187F1F-E814-EAC5-3016-FF2045C36C1B}"/>
+          </ac:spMkLst>
+        </pc:spChg>
+        <pc:spChg chg="del">
+          <ac:chgData name="Etienne Berthet" userId="b87b9fbd-ebe0-40b1-80a1-0443c4f6f4de" providerId="ADAL" clId="{6B8AEB68-E4F9-4E25-8803-C4FAF66D4D7B}" dt="2025-12-17T00:54:56.265" v="0" actId="478"/>
+          <ac:spMkLst>
+            <pc:docMk/>
+            <pc:sldMk cId="4117449452" sldId="257"/>
+            <ac:spMk id="33" creationId="{EB345525-235F-04C0-FFF1-FFFE7B4A913D}"/>
+          </ac:spMkLst>
+        </pc:spChg>
+        <pc:spChg chg="del">
+          <ac:chgData name="Etienne Berthet" userId="b87b9fbd-ebe0-40b1-80a1-0443c4f6f4de" providerId="ADAL" clId="{6B8AEB68-E4F9-4E25-8803-C4FAF66D4D7B}" dt="2025-12-17T00:54:56.265" v="0" actId="478"/>
+          <ac:spMkLst>
+            <pc:docMk/>
+            <pc:sldMk cId="4117449452" sldId="257"/>
+            <ac:spMk id="35" creationId="{AB593A94-18B9-6A91-0162-19773D731D9B}"/>
+          </ac:spMkLst>
+        </pc:spChg>
+        <pc:spChg chg="del">
+          <ac:chgData name="Etienne Berthet" userId="b87b9fbd-ebe0-40b1-80a1-0443c4f6f4de" providerId="ADAL" clId="{6B8AEB68-E4F9-4E25-8803-C4FAF66D4D7B}" dt="2025-12-17T00:54:56.265" v="0" actId="478"/>
+          <ac:spMkLst>
+            <pc:docMk/>
+            <pc:sldMk cId="4117449452" sldId="257"/>
+            <ac:spMk id="36" creationId="{F395F64D-3387-0D62-F194-A86BEDC31189}"/>
+          </ac:spMkLst>
+        </pc:spChg>
+        <pc:spChg chg="add mod">
+          <ac:chgData name="Etienne Berthet" userId="b87b9fbd-ebe0-40b1-80a1-0443c4f6f4de" providerId="ADAL" clId="{6B8AEB68-E4F9-4E25-8803-C4FAF66D4D7B}" dt="2025-12-17T02:41:46.200" v="632" actId="164"/>
+          <ac:spMkLst>
+            <pc:docMk/>
+            <pc:sldMk cId="4117449452" sldId="257"/>
+            <ac:spMk id="67" creationId="{B455C9BD-44BC-993E-C8B9-62A170FA4528}"/>
+          </ac:spMkLst>
+        </pc:spChg>
+        <pc:spChg chg="add mod">
+          <ac:chgData name="Etienne Berthet" userId="b87b9fbd-ebe0-40b1-80a1-0443c4f6f4de" providerId="ADAL" clId="{6B8AEB68-E4F9-4E25-8803-C4FAF66D4D7B}" dt="2025-12-17T02:41:46.200" v="632" actId="164"/>
+          <ac:spMkLst>
+            <pc:docMk/>
+            <pc:sldMk cId="4117449452" sldId="257"/>
+            <ac:spMk id="70" creationId="{DED0CBC7-5640-DBD2-EEA4-B2902237B651}"/>
+          </ac:spMkLst>
+        </pc:spChg>
+        <pc:spChg chg="add mod">
+          <ac:chgData name="Etienne Berthet" userId="b87b9fbd-ebe0-40b1-80a1-0443c4f6f4de" providerId="ADAL" clId="{6B8AEB68-E4F9-4E25-8803-C4FAF66D4D7B}" dt="2025-12-17T02:41:46.200" v="632" actId="164"/>
+          <ac:spMkLst>
+            <pc:docMk/>
+            <pc:sldMk cId="4117449452" sldId="257"/>
+            <ac:spMk id="71" creationId="{F8922976-9000-9974-9AF7-BA7925D92AAB}"/>
+          </ac:spMkLst>
+        </pc:spChg>
+        <pc:spChg chg="add mod">
+          <ac:chgData name="Etienne Berthet" userId="b87b9fbd-ebe0-40b1-80a1-0443c4f6f4de" providerId="ADAL" clId="{6B8AEB68-E4F9-4E25-8803-C4FAF66D4D7B}" dt="2025-12-17T02:41:46.200" v="632" actId="164"/>
+          <ac:spMkLst>
+            <pc:docMk/>
+            <pc:sldMk cId="4117449452" sldId="257"/>
+            <ac:spMk id="72" creationId="{412C6F05-E107-3038-96FC-CE6A4594403F}"/>
+          </ac:spMkLst>
+        </pc:spChg>
+        <pc:spChg chg="add mod">
+          <ac:chgData name="Etienne Berthet" userId="b87b9fbd-ebe0-40b1-80a1-0443c4f6f4de" providerId="ADAL" clId="{6B8AEB68-E4F9-4E25-8803-C4FAF66D4D7B}" dt="2025-12-17T02:41:46.200" v="632" actId="164"/>
+          <ac:spMkLst>
+            <pc:docMk/>
+            <pc:sldMk cId="4117449452" sldId="257"/>
+            <ac:spMk id="73" creationId="{9F61512F-4C28-F6D8-06C9-CDDE480D84BF}"/>
+          </ac:spMkLst>
+        </pc:spChg>
+        <pc:spChg chg="add mod">
+          <ac:chgData name="Etienne Berthet" userId="b87b9fbd-ebe0-40b1-80a1-0443c4f6f4de" providerId="ADAL" clId="{6B8AEB68-E4F9-4E25-8803-C4FAF66D4D7B}" dt="2025-12-17T02:41:46.200" v="632" actId="164"/>
+          <ac:spMkLst>
+            <pc:docMk/>
+            <pc:sldMk cId="4117449452" sldId="257"/>
+            <ac:spMk id="74" creationId="{C7D821B7-A670-FEF6-325B-E3656FC1A1E7}"/>
+          </ac:spMkLst>
+        </pc:spChg>
         <pc:picChg chg="add del mod">
-          <ac:chgData name="Etienne Charles Berthet" userId="fb84f994-9c36-4b6d-a860-d65119d4ff72" providerId="ADAL" clId="{1A933708-1315-4741-9787-57CA6A1E78DD}" dt="2024-12-09T10:03:07.846" v="14" actId="478"/>
+          <ac:chgData name="Etienne Berthet" userId="b87b9fbd-ebe0-40b1-80a1-0443c4f6f4de" providerId="ADAL" clId="{6B8AEB68-E4F9-4E25-8803-C4FAF66D4D7B}" dt="2025-12-17T01:44:43.461" v="17" actId="478"/>
           <ac:picMkLst>
             <pc:docMk/>
             <pc:sldMk cId="4117449452" sldId="257"/>
-            <ac:picMk id="3" creationId="{81F52180-5F8F-B8C3-8C80-FF547C6E8702}"/>
+            <ac:picMk id="3" creationId="{161F011F-3739-BD82-C2F3-60B93F58968D}"/>
+          </ac:picMkLst>
+        </pc:picChg>
+        <pc:picChg chg="del mod">
+          <ac:chgData name="Etienne Berthet" userId="b87b9fbd-ebe0-40b1-80a1-0443c4f6f4de" providerId="ADAL" clId="{6B8AEB68-E4F9-4E25-8803-C4FAF66D4D7B}" dt="2025-12-17T02:39:24.754" v="526" actId="478"/>
+          <ac:picMkLst>
+            <pc:docMk/>
+            <pc:sldMk cId="4117449452" sldId="257"/>
+            <ac:picMk id="5" creationId="{3AFC8FF9-CEF4-828E-5AB4-E6CD9BB2478D}"/>
           </ac:picMkLst>
         </pc:picChg>
         <pc:picChg chg="add del mod">
-          <ac:chgData name="Etienne Charles Berthet" userId="fb84f994-9c36-4b6d-a860-d65119d4ff72" providerId="ADAL" clId="{1A933708-1315-4741-9787-57CA6A1E78DD}" dt="2024-12-09T18:15:08.825" v="25" actId="478"/>
+          <ac:chgData name="Etienne Berthet" userId="b87b9fbd-ebe0-40b1-80a1-0443c4f6f4de" providerId="ADAL" clId="{6B8AEB68-E4F9-4E25-8803-C4FAF66D4D7B}" dt="2025-12-17T01:45:18.532" v="30" actId="478"/>
           <ac:picMkLst>
             <pc:docMk/>
             <pc:sldMk cId="4117449452" sldId="257"/>
-            <ac:picMk id="6" creationId="{01CD4EAA-5B94-E878-145B-EDDD2D21EDE9}"/>
+            <ac:picMk id="6" creationId="{46FB6710-21D1-E169-4CF3-2E1D2FB71054}"/>
           </ac:picMkLst>
         </pc:picChg>
+        <pc:picChg chg="del mod">
+          <ac:chgData name="Etienne Berthet" userId="b87b9fbd-ebe0-40b1-80a1-0443c4f6f4de" providerId="ADAL" clId="{6B8AEB68-E4F9-4E25-8803-C4FAF66D4D7B}" dt="2025-12-17T02:37:53.653" v="498" actId="478"/>
+          <ac:picMkLst>
+            <pc:docMk/>
+            <pc:sldMk cId="4117449452" sldId="257"/>
+            <ac:picMk id="7" creationId="{971BFD5F-0966-6CC0-9B55-695535899544}"/>
+          </ac:picMkLst>
+        </pc:picChg>
+        <pc:picChg chg="del mod">
+          <ac:chgData name="Etienne Berthet" userId="b87b9fbd-ebe0-40b1-80a1-0443c4f6f4de" providerId="ADAL" clId="{6B8AEB68-E4F9-4E25-8803-C4FAF66D4D7B}" dt="2025-12-17T02:36:56.502" v="471" actId="478"/>
+          <ac:picMkLst>
+            <pc:docMk/>
+            <pc:sldMk cId="4117449452" sldId="257"/>
+            <ac:picMk id="9" creationId="{C73207F8-2D5E-48A1-DEC8-CCF62D56D688}"/>
+          </ac:picMkLst>
+        </pc:picChg>
+        <pc:picChg chg="add del mod">
+          <ac:chgData name="Etienne Berthet" userId="b87b9fbd-ebe0-40b1-80a1-0443c4f6f4de" providerId="ADAL" clId="{6B8AEB68-E4F9-4E25-8803-C4FAF66D4D7B}" dt="2025-12-17T01:45:31.680" v="34" actId="478"/>
+          <ac:picMkLst>
+            <pc:docMk/>
+            <pc:sldMk cId="4117449452" sldId="257"/>
+            <ac:picMk id="10" creationId="{B85DEE25-5829-3E29-74E8-BB00337C5FA8}"/>
+          </ac:picMkLst>
+        </pc:picChg>
+        <pc:picChg chg="add del mod">
+          <ac:chgData name="Etienne Berthet" userId="b87b9fbd-ebe0-40b1-80a1-0443c4f6f4de" providerId="ADAL" clId="{6B8AEB68-E4F9-4E25-8803-C4FAF66D4D7B}" dt="2025-12-17T01:45:45.808" v="38" actId="478"/>
+          <ac:picMkLst>
+            <pc:docMk/>
+            <pc:sldMk cId="4117449452" sldId="257"/>
+            <ac:picMk id="12" creationId="{11BDBC64-3464-E84E-8545-9D9D40C7A115}"/>
+          </ac:picMkLst>
+        </pc:picChg>
+        <pc:picChg chg="add del mod">
+          <ac:chgData name="Etienne Berthet" userId="b87b9fbd-ebe0-40b1-80a1-0443c4f6f4de" providerId="ADAL" clId="{6B8AEB68-E4F9-4E25-8803-C4FAF66D4D7B}" dt="2025-12-17T01:46:16.270" v="45" actId="478"/>
+          <ac:picMkLst>
+            <pc:docMk/>
+            <pc:sldMk cId="4117449452" sldId="257"/>
+            <ac:picMk id="15" creationId="{FD71ECC2-1E78-1B5D-F159-38F78701B7EB}"/>
+          </ac:picMkLst>
+        </pc:picChg>
+        <pc:picChg chg="add del mod">
+          <ac:chgData name="Etienne Berthet" userId="b87b9fbd-ebe0-40b1-80a1-0443c4f6f4de" providerId="ADAL" clId="{6B8AEB68-E4F9-4E25-8803-C4FAF66D4D7B}" dt="2025-12-17T01:47:15.294" v="49" actId="478"/>
+          <ac:picMkLst>
+            <pc:docMk/>
+            <pc:sldMk cId="4117449452" sldId="257"/>
+            <ac:picMk id="17" creationId="{814710CD-7176-3720-D7E7-FFB54BE256A4}"/>
+          </ac:picMkLst>
+        </pc:picChg>
+        <pc:picChg chg="add del mod">
+          <ac:chgData name="Etienne Berthet" userId="b87b9fbd-ebe0-40b1-80a1-0443c4f6f4de" providerId="ADAL" clId="{6B8AEB68-E4F9-4E25-8803-C4FAF66D4D7B}" dt="2025-12-17T01:47:33.122" v="53" actId="478"/>
+          <ac:picMkLst>
+            <pc:docMk/>
+            <pc:sldMk cId="4117449452" sldId="257"/>
+            <ac:picMk id="24" creationId="{72EF4E9B-C8BD-8EC6-185A-F5406F89B32B}"/>
+          </ac:picMkLst>
+        </pc:picChg>
+        <pc:picChg chg="add del mod">
+          <ac:chgData name="Etienne Berthet" userId="b87b9fbd-ebe0-40b1-80a1-0443c4f6f4de" providerId="ADAL" clId="{6B8AEB68-E4F9-4E25-8803-C4FAF66D4D7B}" dt="2025-12-17T01:50:31.181" v="81" actId="478"/>
+          <ac:picMkLst>
+            <pc:docMk/>
+            <pc:sldMk cId="4117449452" sldId="257"/>
+            <ac:picMk id="26" creationId="{179AED07-DABE-5A50-3924-7FBCC250EFC9}"/>
+          </ac:picMkLst>
+        </pc:picChg>
+        <pc:picChg chg="add mod modCrop">
+          <ac:chgData name="Etienne Berthet" userId="b87b9fbd-ebe0-40b1-80a1-0443c4f6f4de" providerId="ADAL" clId="{6B8AEB68-E4F9-4E25-8803-C4FAF66D4D7B}" dt="2025-12-17T02:39:38.818" v="597" actId="1037"/>
+          <ac:picMkLst>
+            <pc:docMk/>
+            <pc:sldMk cId="4117449452" sldId="257"/>
+            <ac:picMk id="28" creationId="{353FCF2B-FF5C-30B2-9A28-559C82707807}"/>
+          </ac:picMkLst>
+        </pc:picChg>
+        <pc:picChg chg="add del mod">
+          <ac:chgData name="Etienne Berthet" userId="b87b9fbd-ebe0-40b1-80a1-0443c4f6f4de" providerId="ADAL" clId="{6B8AEB68-E4F9-4E25-8803-C4FAF66D4D7B}" dt="2025-12-17T01:48:42.366" v="65" actId="478"/>
+          <ac:picMkLst>
+            <pc:docMk/>
+            <pc:sldMk cId="4117449452" sldId="257"/>
+            <ac:picMk id="30" creationId="{A6FB6B47-8C92-404B-564E-CBBC1E9E420B}"/>
+          </ac:picMkLst>
+        </pc:picChg>
+        <pc:picChg chg="add del mod">
+          <ac:chgData name="Etienne Berthet" userId="b87b9fbd-ebe0-40b1-80a1-0443c4f6f4de" providerId="ADAL" clId="{6B8AEB68-E4F9-4E25-8803-C4FAF66D4D7B}" dt="2025-12-17T02:03:26.539" v="186" actId="478"/>
+          <ac:picMkLst>
+            <pc:docMk/>
+            <pc:sldMk cId="4117449452" sldId="257"/>
+            <ac:picMk id="32" creationId="{B9B785F7-0A3C-0517-5FEF-0B637AFC9217}"/>
+          </ac:picMkLst>
+        </pc:picChg>
+        <pc:picChg chg="add del mod">
+          <ac:chgData name="Etienne Berthet" userId="b87b9fbd-ebe0-40b1-80a1-0443c4f6f4de" providerId="ADAL" clId="{6B8AEB68-E4F9-4E25-8803-C4FAF66D4D7B}" dt="2025-12-17T01:53:39.177" v="122" actId="478"/>
+          <ac:picMkLst>
+            <pc:docMk/>
+            <pc:sldMk cId="4117449452" sldId="257"/>
+            <ac:picMk id="34" creationId="{8511829C-A2F7-933A-FEC7-82925D896D86}"/>
+          </ac:picMkLst>
+        </pc:picChg>
+        <pc:picChg chg="add del mod">
+          <ac:chgData name="Etienne Berthet" userId="b87b9fbd-ebe0-40b1-80a1-0443c4f6f4de" providerId="ADAL" clId="{6B8AEB68-E4F9-4E25-8803-C4FAF66D4D7B}" dt="2025-12-17T02:03:27.320" v="187" actId="478"/>
+          <ac:picMkLst>
+            <pc:docMk/>
+            <pc:sldMk cId="4117449452" sldId="257"/>
+            <ac:picMk id="36" creationId="{88361BFE-F314-2F5D-8BA1-58D8675454DF}"/>
+          </ac:picMkLst>
+        </pc:picChg>
+        <pc:picChg chg="add del mod">
+          <ac:chgData name="Etienne Berthet" userId="b87b9fbd-ebe0-40b1-80a1-0443c4f6f4de" providerId="ADAL" clId="{6B8AEB68-E4F9-4E25-8803-C4FAF66D4D7B}" dt="2025-12-17T02:03:25.956" v="185" actId="478"/>
+          <ac:picMkLst>
+            <pc:docMk/>
+            <pc:sldMk cId="4117449452" sldId="257"/>
+            <ac:picMk id="38" creationId="{7FBE06C4-380F-F180-56B0-8C895C1841C3}"/>
+          </ac:picMkLst>
+        </pc:picChg>
+        <pc:picChg chg="add del mod">
+          <ac:chgData name="Etienne Berthet" userId="b87b9fbd-ebe0-40b1-80a1-0443c4f6f4de" providerId="ADAL" clId="{6B8AEB68-E4F9-4E25-8803-C4FAF66D4D7B}" dt="2025-12-17T02:03:27.903" v="188" actId="478"/>
+          <ac:picMkLst>
+            <pc:docMk/>
+            <pc:sldMk cId="4117449452" sldId="257"/>
+            <ac:picMk id="40" creationId="{764138C0-FF9D-E1DF-CD79-8C229E56ADD2}"/>
+          </ac:picMkLst>
+        </pc:picChg>
+        <pc:picChg chg="add del mod">
+          <ac:chgData name="Etienne Berthet" userId="b87b9fbd-ebe0-40b1-80a1-0443c4f6f4de" providerId="ADAL" clId="{6B8AEB68-E4F9-4E25-8803-C4FAF66D4D7B}" dt="2025-12-17T01:57:26.450" v="166" actId="478"/>
+          <ac:picMkLst>
+            <pc:docMk/>
+            <pc:sldMk cId="4117449452" sldId="257"/>
+            <ac:picMk id="42" creationId="{4DDAF497-BEEF-AF61-F3DB-A9EC55120FD0}"/>
+          </ac:picMkLst>
+        </pc:picChg>
+        <pc:picChg chg="add del mod">
+          <ac:chgData name="Etienne Berthet" userId="b87b9fbd-ebe0-40b1-80a1-0443c4f6f4de" providerId="ADAL" clId="{6B8AEB68-E4F9-4E25-8803-C4FAF66D4D7B}" dt="2025-12-17T02:03:28.384" v="189" actId="478"/>
+          <ac:picMkLst>
+            <pc:docMk/>
+            <pc:sldMk cId="4117449452" sldId="257"/>
+            <ac:picMk id="44" creationId="{0B89F658-FFD8-8C19-94F4-39BFB117A44B}"/>
+          </ac:picMkLst>
+        </pc:picChg>
+        <pc:picChg chg="add mod ord modCrop">
+          <ac:chgData name="Etienne Berthet" userId="b87b9fbd-ebe0-40b1-80a1-0443c4f6f4de" providerId="ADAL" clId="{6B8AEB68-E4F9-4E25-8803-C4FAF66D4D7B}" dt="2025-12-17T02:39:38.818" v="597" actId="1037"/>
+          <ac:picMkLst>
+            <pc:docMk/>
+            <pc:sldMk cId="4117449452" sldId="257"/>
+            <ac:picMk id="46" creationId="{9A654223-BA52-9DB9-9DFB-EDEDFDA49493}"/>
+          </ac:picMkLst>
+        </pc:picChg>
+        <pc:picChg chg="add del mod">
+          <ac:chgData name="Etienne Berthet" userId="b87b9fbd-ebe0-40b1-80a1-0443c4f6f4de" providerId="ADAL" clId="{6B8AEB68-E4F9-4E25-8803-C4FAF66D4D7B}" dt="2025-12-17T02:04:50.980" v="212" actId="478"/>
+          <ac:picMkLst>
+            <pc:docMk/>
+            <pc:sldMk cId="4117449452" sldId="257"/>
+            <ac:picMk id="48" creationId="{6298CCA9-8E66-8DB6-C10B-98DF91A6F024}"/>
+          </ac:picMkLst>
+        </pc:picChg>
+        <pc:picChg chg="add del mod">
+          <ac:chgData name="Etienne Berthet" userId="b87b9fbd-ebe0-40b1-80a1-0443c4f6f4de" providerId="ADAL" clId="{6B8AEB68-E4F9-4E25-8803-C4FAF66D4D7B}" dt="2025-12-17T02:05:34.437" v="216" actId="478"/>
+          <ac:picMkLst>
+            <pc:docMk/>
+            <pc:sldMk cId="4117449452" sldId="257"/>
+            <ac:picMk id="50" creationId="{5E75C07D-C03D-8AA9-6EBE-091FFBD5BD58}"/>
+          </ac:picMkLst>
+        </pc:picChg>
+        <pc:picChg chg="add del mod">
+          <ac:chgData name="Etienne Berthet" userId="b87b9fbd-ebe0-40b1-80a1-0443c4f6f4de" providerId="ADAL" clId="{6B8AEB68-E4F9-4E25-8803-C4FAF66D4D7B}" dt="2025-12-17T02:06:39.124" v="231" actId="478"/>
+          <ac:picMkLst>
+            <pc:docMk/>
+            <pc:sldMk cId="4117449452" sldId="257"/>
+            <ac:picMk id="52" creationId="{F9F39C1C-174C-B912-1AD7-79EC58F9C264}"/>
+          </ac:picMkLst>
+        </pc:picChg>
+        <pc:picChg chg="add del mod">
+          <ac:chgData name="Etienne Berthet" userId="b87b9fbd-ebe0-40b1-80a1-0443c4f6f4de" providerId="ADAL" clId="{6B8AEB68-E4F9-4E25-8803-C4FAF66D4D7B}" dt="2025-12-17T02:07:14.761" v="245" actId="478"/>
+          <ac:picMkLst>
+            <pc:docMk/>
+            <pc:sldMk cId="4117449452" sldId="257"/>
+            <ac:picMk id="54" creationId="{80C71382-64C4-D71A-09F9-43B3372B072F}"/>
+          </ac:picMkLst>
+        </pc:picChg>
+        <pc:picChg chg="add del mod">
+          <ac:chgData name="Etienne Berthet" userId="b87b9fbd-ebe0-40b1-80a1-0443c4f6f4de" providerId="ADAL" clId="{6B8AEB68-E4F9-4E25-8803-C4FAF66D4D7B}" dt="2025-12-17T02:11:38.311" v="285" actId="478"/>
+          <ac:picMkLst>
+            <pc:docMk/>
+            <pc:sldMk cId="4117449452" sldId="257"/>
+            <ac:picMk id="56" creationId="{87C6062C-477E-2270-E080-28CD810AC2B2}"/>
+          </ac:picMkLst>
+        </pc:picChg>
+        <pc:picChg chg="add del mod">
+          <ac:chgData name="Etienne Berthet" userId="b87b9fbd-ebe0-40b1-80a1-0443c4f6f4de" providerId="ADAL" clId="{6B8AEB68-E4F9-4E25-8803-C4FAF66D4D7B}" dt="2025-12-17T02:10:20.055" v="272" actId="478"/>
+          <ac:picMkLst>
+            <pc:docMk/>
+            <pc:sldMk cId="4117449452" sldId="257"/>
+            <ac:picMk id="58" creationId="{E6A44069-925E-5894-C616-EE5AAA63378C}"/>
+          </ac:picMkLst>
+        </pc:picChg>
+        <pc:picChg chg="add del mod">
+          <ac:chgData name="Etienne Berthet" userId="b87b9fbd-ebe0-40b1-80a1-0443c4f6f4de" providerId="ADAL" clId="{6B8AEB68-E4F9-4E25-8803-C4FAF66D4D7B}" dt="2025-12-17T02:11:36.465" v="284" actId="478"/>
+          <ac:picMkLst>
+            <pc:docMk/>
+            <pc:sldMk cId="4117449452" sldId="257"/>
+            <ac:picMk id="60" creationId="{60DB7744-A3D7-0D3C-4335-4EB9C3A8A159}"/>
+          </ac:picMkLst>
+        </pc:picChg>
+        <pc:picChg chg="add del mod">
+          <ac:chgData name="Etienne Berthet" userId="b87b9fbd-ebe0-40b1-80a1-0443c4f6f4de" providerId="ADAL" clId="{6B8AEB68-E4F9-4E25-8803-C4FAF66D4D7B}" dt="2025-12-17T02:28:12.048" v="333" actId="478"/>
+          <ac:picMkLst>
+            <pc:docMk/>
+            <pc:sldMk cId="4117449452" sldId="257"/>
+            <ac:picMk id="62" creationId="{03EBF08E-028B-08D7-BFA3-ECBD0B4C98C4}"/>
+          </ac:picMkLst>
+        </pc:picChg>
+        <pc:picChg chg="add del mod">
+          <ac:chgData name="Etienne Berthet" userId="b87b9fbd-ebe0-40b1-80a1-0443c4f6f4de" providerId="ADAL" clId="{6B8AEB68-E4F9-4E25-8803-C4FAF66D4D7B}" dt="2025-12-17T02:28:11.112" v="332" actId="478"/>
+          <ac:picMkLst>
+            <pc:docMk/>
+            <pc:sldMk cId="4117449452" sldId="257"/>
+            <ac:picMk id="64" creationId="{D6CD23B4-6666-072F-DF14-51B5934D261C}"/>
+          </ac:picMkLst>
+        </pc:picChg>
+        <pc:picChg chg="add mod modCrop">
+          <ac:chgData name="Etienne Berthet" userId="b87b9fbd-ebe0-40b1-80a1-0443c4f6f4de" providerId="ADAL" clId="{6B8AEB68-E4F9-4E25-8803-C4FAF66D4D7B}" dt="2025-12-17T02:41:46.200" v="632" actId="164"/>
+          <ac:picMkLst>
+            <pc:docMk/>
+            <pc:sldMk cId="4117449452" sldId="257"/>
+            <ac:picMk id="66" creationId="{0053E0E0-4D60-42A6-73BB-CDB88CC6CCE9}"/>
+          </ac:picMkLst>
+        </pc:picChg>
+        <pc:cxnChg chg="add del mod">
+          <ac:chgData name="Etienne Berthet" userId="b87b9fbd-ebe0-40b1-80a1-0443c4f6f4de" providerId="ADAL" clId="{6B8AEB68-E4F9-4E25-8803-C4FAF66D4D7B}" dt="2025-12-17T02:39:41.932" v="598" actId="478"/>
+          <ac:cxnSpMkLst>
+            <pc:docMk/>
+            <pc:sldMk cId="4117449452" sldId="257"/>
+            <ac:cxnSpMk id="69" creationId="{19830DBF-BFFC-45F4-02C0-996C23FCBA16}"/>
+          </ac:cxnSpMkLst>
+        </pc:cxnChg>
+        <pc:cxnChg chg="add mod">
+          <ac:chgData name="Etienne Berthet" userId="b87b9fbd-ebe0-40b1-80a1-0443c4f6f4de" providerId="ADAL" clId="{6B8AEB68-E4F9-4E25-8803-C4FAF66D4D7B}" dt="2025-12-17T02:41:14.511" v="620" actId="1036"/>
+          <ac:cxnSpMkLst>
+            <pc:docMk/>
+            <pc:sldMk cId="4117449452" sldId="257"/>
+            <ac:cxnSpMk id="76" creationId="{28DC725B-0F4A-FDBB-5E01-C6029901C93F}"/>
+          </ac:cxnSpMkLst>
+        </pc:cxnChg>
+        <pc:cxnChg chg="add mod">
+          <ac:chgData name="Etienne Berthet" userId="b87b9fbd-ebe0-40b1-80a1-0443c4f6f4de" providerId="ADAL" clId="{6B8AEB68-E4F9-4E25-8803-C4FAF66D4D7B}" dt="2025-12-17T02:41:26.959" v="630" actId="1037"/>
+          <ac:cxnSpMkLst>
+            <pc:docMk/>
+            <pc:sldMk cId="4117449452" sldId="257"/>
+            <ac:cxnSpMk id="78" creationId="{7CBFDC97-F97B-B14D-1246-CACC10DB91B2}"/>
+          </ac:cxnSpMkLst>
+        </pc:cxnChg>
       </pc:sldChg>
     </pc:docChg>
   </pc:docChgLst>
@@ -288,7 +720,7 @@
           <a:p>
             <a:fld id="{261C5DB7-E32A-4215-AEFF-0F5294225CE5}" type="datetimeFigureOut">
               <a:rPr lang="en-US" smtClean="0"/>
-              <a:t>12/8/2024</a:t>
+              <a:t>12/16/2025</a:t>
             </a:fld>
             <a:endParaRPr lang="en-US"/>
           </a:p>
@@ -458,7 +890,7 @@
           <a:p>
             <a:fld id="{261C5DB7-E32A-4215-AEFF-0F5294225CE5}" type="datetimeFigureOut">
               <a:rPr lang="en-US" smtClean="0"/>
-              <a:t>12/8/2024</a:t>
+              <a:t>12/16/2025</a:t>
             </a:fld>
             <a:endParaRPr lang="en-US"/>
           </a:p>
@@ -638,7 +1070,7 @@
           <a:p>
             <a:fld id="{261C5DB7-E32A-4215-AEFF-0F5294225CE5}" type="datetimeFigureOut">
               <a:rPr lang="en-US" smtClean="0"/>
-              <a:t>12/8/2024</a:t>
+              <a:t>12/16/2025</a:t>
             </a:fld>
             <a:endParaRPr lang="en-US"/>
           </a:p>
@@ -808,7 +1240,7 @@
           <a:p>
             <a:fld id="{261C5DB7-E32A-4215-AEFF-0F5294225CE5}" type="datetimeFigureOut">
               <a:rPr lang="en-US" smtClean="0"/>
-              <a:t>12/8/2024</a:t>
+              <a:t>12/16/2025</a:t>
             </a:fld>
             <a:endParaRPr lang="en-US"/>
           </a:p>
@@ -1054,7 +1486,7 @@
           <a:p>
             <a:fld id="{261C5DB7-E32A-4215-AEFF-0F5294225CE5}" type="datetimeFigureOut">
               <a:rPr lang="en-US" smtClean="0"/>
-              <a:t>12/8/2024</a:t>
+              <a:t>12/16/2025</a:t>
             </a:fld>
             <a:endParaRPr lang="en-US"/>
           </a:p>
@@ -1286,7 +1718,7 @@
           <a:p>
             <a:fld id="{261C5DB7-E32A-4215-AEFF-0F5294225CE5}" type="datetimeFigureOut">
               <a:rPr lang="en-US" smtClean="0"/>
-              <a:t>12/8/2024</a:t>
+              <a:t>12/16/2025</a:t>
             </a:fld>
             <a:endParaRPr lang="en-US"/>
           </a:p>
@@ -1653,7 +2085,7 @@
           <a:p>
             <a:fld id="{261C5DB7-E32A-4215-AEFF-0F5294225CE5}" type="datetimeFigureOut">
               <a:rPr lang="en-US" smtClean="0"/>
-              <a:t>12/8/2024</a:t>
+              <a:t>12/16/2025</a:t>
             </a:fld>
             <a:endParaRPr lang="en-US"/>
           </a:p>
@@ -1771,7 +2203,7 @@
           <a:p>
             <a:fld id="{261C5DB7-E32A-4215-AEFF-0F5294225CE5}" type="datetimeFigureOut">
               <a:rPr lang="en-US" smtClean="0"/>
-              <a:t>12/8/2024</a:t>
+              <a:t>12/16/2025</a:t>
             </a:fld>
             <a:endParaRPr lang="en-US"/>
           </a:p>
@@ -1866,7 +2298,7 @@
           <a:p>
             <a:fld id="{261C5DB7-E32A-4215-AEFF-0F5294225CE5}" type="datetimeFigureOut">
               <a:rPr lang="en-US" smtClean="0"/>
-              <a:t>12/8/2024</a:t>
+              <a:t>12/16/2025</a:t>
             </a:fld>
             <a:endParaRPr lang="en-US"/>
           </a:p>
@@ -2143,7 +2575,7 @@
           <a:p>
             <a:fld id="{261C5DB7-E32A-4215-AEFF-0F5294225CE5}" type="datetimeFigureOut">
               <a:rPr lang="en-US" smtClean="0"/>
-              <a:t>12/8/2024</a:t>
+              <a:t>12/16/2025</a:t>
             </a:fld>
             <a:endParaRPr lang="en-US"/>
           </a:p>
@@ -2400,7 +2832,7 @@
           <a:p>
             <a:fld id="{261C5DB7-E32A-4215-AEFF-0F5294225CE5}" type="datetimeFigureOut">
               <a:rPr lang="en-US" smtClean="0"/>
-              <a:t>12/8/2024</a:t>
+              <a:t>12/16/2025</a:t>
             </a:fld>
             <a:endParaRPr lang="en-US"/>
           </a:p>
@@ -2613,7 +3045,7 @@
           <a:p>
             <a:fld id="{261C5DB7-E32A-4215-AEFF-0F5294225CE5}" type="datetimeFigureOut">
               <a:rPr lang="en-US" smtClean="0"/>
-              <a:t>12/8/2024</a:t>
+              <a:t>12/16/2025</a:t>
             </a:fld>
             <a:endParaRPr lang="en-US"/>
           </a:p>
@@ -3018,920 +3450,648 @@
           <a:chExt cx="0" cy="0"/>
         </a:xfrm>
       </p:grpSpPr>
-      <p:pic>
-        <p:nvPicPr>
-          <p:cNvPr id="5" name="Picture 4" descr="A close-up of a diagram&#10;&#10;Description automatically generated">
+      <p:grpSp>
+        <p:nvGrpSpPr>
+          <p:cNvPr id="79" name="Group 78">
             <a:extLst>
               <a:ext uri="{FF2B5EF4-FFF2-40B4-BE49-F238E27FC236}">
-                <a16:creationId xmlns:a16="http://schemas.microsoft.com/office/drawing/2014/main" id="{3AFC8FF9-CEF4-828E-5AB4-E6CD9BB2478D}"/>
+                <a16:creationId xmlns:a16="http://schemas.microsoft.com/office/drawing/2014/main" id="{1AAA3E9F-D570-5872-FE85-4D4177B35E8B}"/>
               </a:ext>
             </a:extLst>
           </p:cNvPr>
-          <p:cNvPicPr>
-            <a:picLocks noChangeAspect="1"/>
-          </p:cNvPicPr>
+          <p:cNvGrpSpPr/>
           <p:nvPr/>
-        </p:nvPicPr>
-        <p:blipFill>
-          <a:blip r:embed="rId2">
-            <a:extLst>
-              <a:ext uri="{28A0092B-C50C-407E-A947-70E740481C1C}">
-                <a14:useLocalDpi xmlns:a14="http://schemas.microsoft.com/office/drawing/2010/main" val="0"/>
-              </a:ext>
-            </a:extLst>
-          </a:blip>
-          <a:srcRect l="6005" t="9978" r="6005" b="6608"/>
-          <a:stretch/>
-        </p:blipFill>
-        <p:spPr>
+        </p:nvGrpSpPr>
+        <p:grpSpPr>
           <a:xfrm>
-            <a:off x="1935480" y="0"/>
-            <a:ext cx="3985260" cy="2867087"/>
+            <a:off x="13029" y="-325994"/>
+            <a:ext cx="7078553" cy="10252727"/>
+            <a:chOff x="13029" y="-325994"/>
+            <a:chExt cx="7078553" cy="10252727"/>
           </a:xfrm>
-          <a:prstGeom prst="rect">
-            <a:avLst/>
-          </a:prstGeom>
-        </p:spPr>
-      </p:pic>
-      <p:pic>
-        <p:nvPicPr>
-          <p:cNvPr id="7" name="Picture 6" descr="A diagram of a number of data&#10;&#10;Description automatically generated with medium confidence">
-            <a:extLst>
-              <a:ext uri="{FF2B5EF4-FFF2-40B4-BE49-F238E27FC236}">
-                <a16:creationId xmlns:a16="http://schemas.microsoft.com/office/drawing/2014/main" id="{971BFD5F-0966-6CC0-9B55-695535899544}"/>
-              </a:ext>
-            </a:extLst>
-          </p:cNvPr>
-          <p:cNvPicPr>
-            <a:picLocks noChangeAspect="1"/>
-          </p:cNvPicPr>
-          <p:nvPr/>
-        </p:nvPicPr>
-        <p:blipFill>
-          <a:blip r:embed="rId3">
-            <a:extLst>
-              <a:ext uri="{28A0092B-C50C-407E-A947-70E740481C1C}">
-                <a14:useLocalDpi xmlns:a14="http://schemas.microsoft.com/office/drawing/2010/main" val="0"/>
-              </a:ext>
-            </a:extLst>
-          </a:blip>
-          <a:srcRect l="5744" t="8445" r="6528" b="5393"/>
-          <a:stretch/>
-        </p:blipFill>
-        <p:spPr>
-          <a:xfrm>
-            <a:off x="1935480" y="2852865"/>
-            <a:ext cx="3985260" cy="2535001"/>
-          </a:xfrm>
-          <a:prstGeom prst="rect">
-            <a:avLst/>
-          </a:prstGeom>
-        </p:spPr>
-      </p:pic>
-      <p:pic>
-        <p:nvPicPr>
-          <p:cNvPr id="9" name="Picture 8" descr="A close-up of a chart&#10;&#10;Description automatically generated">
-            <a:extLst>
-              <a:ext uri="{FF2B5EF4-FFF2-40B4-BE49-F238E27FC236}">
-                <a16:creationId xmlns:a16="http://schemas.microsoft.com/office/drawing/2014/main" id="{C73207F8-2D5E-48A1-DEC8-CCF62D56D688}"/>
-              </a:ext>
-            </a:extLst>
-          </p:cNvPr>
-          <p:cNvPicPr>
-            <a:picLocks noChangeAspect="1"/>
-          </p:cNvPicPr>
-          <p:nvPr/>
-        </p:nvPicPr>
-        <p:blipFill>
-          <a:blip r:embed="rId4">
-            <a:extLst>
-              <a:ext uri="{28A0092B-C50C-407E-A947-70E740481C1C}">
-                <a14:useLocalDpi xmlns:a14="http://schemas.microsoft.com/office/drawing/2010/main" val="0"/>
-              </a:ext>
-            </a:extLst>
-          </a:blip>
-          <a:srcRect l="5406" t="9232" r="6713" b="5946"/>
-          <a:stretch/>
-        </p:blipFill>
-        <p:spPr>
-          <a:xfrm>
-            <a:off x="1935480" y="5446741"/>
-            <a:ext cx="3985260" cy="1234440"/>
-          </a:xfrm>
-          <a:prstGeom prst="rect">
-            <a:avLst/>
-          </a:prstGeom>
-        </p:spPr>
-      </p:pic>
-      <p:sp>
-        <p:nvSpPr>
-          <p:cNvPr id="14" name="Rectangle 13">
-            <a:extLst>
-              <a:ext uri="{FF2B5EF4-FFF2-40B4-BE49-F238E27FC236}">
-                <a16:creationId xmlns:a16="http://schemas.microsoft.com/office/drawing/2014/main" id="{FA36933E-B0E1-3900-0466-73B39E941941}"/>
-              </a:ext>
-            </a:extLst>
-          </p:cNvPr>
-          <p:cNvSpPr/>
-          <p:nvPr/>
-        </p:nvSpPr>
-        <p:spPr>
-          <a:xfrm>
-            <a:off x="1805880" y="273211"/>
-            <a:ext cx="129600" cy="2609116"/>
-          </a:xfrm>
-          <a:prstGeom prst="rect">
-            <a:avLst/>
-          </a:prstGeom>
-          <a:solidFill>
-            <a:schemeClr val="bg1">
-              <a:lumMod val="50000"/>
-            </a:schemeClr>
-          </a:solidFill>
-          <a:ln>
+        </p:grpSpPr>
+        <p:sp>
+          <p:nvSpPr>
+            <p:cNvPr id="20" name="TextBox 19">
+              <a:extLst>
+                <a:ext uri="{FF2B5EF4-FFF2-40B4-BE49-F238E27FC236}">
+                  <a16:creationId xmlns:a16="http://schemas.microsoft.com/office/drawing/2014/main" id="{8D1195AE-83FD-14A8-56BD-022E9EF726DE}"/>
+                </a:ext>
+              </a:extLst>
+            </p:cNvPr>
+            <p:cNvSpPr txBox="1"/>
+            <p:nvPr/>
+          </p:nvSpPr>
+          <p:spPr>
+            <a:xfrm>
+              <a:off x="19441" y="399036"/>
+              <a:ext cx="338554" cy="369332"/>
+            </a:xfrm>
+            <a:prstGeom prst="rect">
+              <a:avLst/>
+            </a:prstGeom>
             <a:noFill/>
-          </a:ln>
-        </p:spPr>
-        <p:style>
-          <a:lnRef idx="2">
-            <a:schemeClr val="accent1">
-              <a:shade val="15000"/>
-            </a:schemeClr>
-          </a:lnRef>
-          <a:fillRef idx="1">
-            <a:schemeClr val="accent1"/>
-          </a:fillRef>
-          <a:effectRef idx="0">
-            <a:schemeClr val="accent1"/>
-          </a:effectRef>
-          <a:fontRef idx="minor">
-            <a:schemeClr val="lt1"/>
-          </a:fontRef>
-        </p:style>
-        <p:txBody>
-          <a:bodyPr rtlCol="0" anchor="ctr"/>
-          <a:lstStyle/>
-          <a:p>
-            <a:pPr algn="ctr"/>
-            <a:endParaRPr lang="en-US" dirty="0"/>
-          </a:p>
-        </p:txBody>
-      </p:sp>
-      <p:sp>
-        <p:nvSpPr>
-          <p:cNvPr id="18" name="Rectangle 17">
-            <a:extLst>
-              <a:ext uri="{FF2B5EF4-FFF2-40B4-BE49-F238E27FC236}">
-                <a16:creationId xmlns:a16="http://schemas.microsoft.com/office/drawing/2014/main" id="{6E8C9F97-CE20-011D-2BC5-83FAA905A304}"/>
-              </a:ext>
-            </a:extLst>
-          </p:cNvPr>
-          <p:cNvSpPr/>
-          <p:nvPr/>
-        </p:nvSpPr>
-        <p:spPr>
-          <a:xfrm>
-            <a:off x="1805880" y="3155538"/>
-            <a:ext cx="129600" cy="1671359"/>
-          </a:xfrm>
-          <a:prstGeom prst="rect">
-            <a:avLst/>
-          </a:prstGeom>
-          <a:solidFill>
-            <a:schemeClr val="bg1">
-              <a:lumMod val="50000"/>
-            </a:schemeClr>
-          </a:solidFill>
-          <a:ln>
+          </p:spPr>
+          <p:txBody>
+            <a:bodyPr wrap="none" rtlCol="0">
+              <a:spAutoFit/>
+            </a:bodyPr>
+            <a:lstStyle/>
+            <a:p>
+              <a:r>
+                <a:rPr lang="en-US" dirty="0">
+                  <a:latin typeface="Arial" panose="020B0604020202020204" pitchFamily="34" charset="0"/>
+                  <a:cs typeface="Arial" panose="020B0604020202020204" pitchFamily="34" charset="0"/>
+                </a:rPr>
+                <a:t>A</a:t>
+              </a:r>
+            </a:p>
+          </p:txBody>
+        </p:sp>
+        <p:pic>
+          <p:nvPicPr>
+            <p:cNvPr id="28" name="Picture 27" descr="A blue and red lines and a white background&#10;&#10;AI-generated content may be incorrect.">
+              <a:extLst>
+                <a:ext uri="{FF2B5EF4-FFF2-40B4-BE49-F238E27FC236}">
+                  <a16:creationId xmlns:a16="http://schemas.microsoft.com/office/drawing/2014/main" id="{353FCF2B-FF5C-30B2-9A28-559C82707807}"/>
+                </a:ext>
+              </a:extLst>
+            </p:cNvPr>
+            <p:cNvPicPr>
+              <a:picLocks noChangeAspect="1"/>
+            </p:cNvPicPr>
+            <p:nvPr/>
+          </p:nvPicPr>
+          <p:blipFill>
+            <a:blip r:embed="rId2">
+              <a:extLst>
+                <a:ext uri="{28A0092B-C50C-407E-A947-70E740481C1C}">
+                  <a14:useLocalDpi xmlns:a14="http://schemas.microsoft.com/office/drawing/2010/main" val="0"/>
+                </a:ext>
+              </a:extLst>
+            </a:blip>
+            <a:srcRect l="3809" t="8553" r="2541" b="6485"/>
+            <a:stretch>
+              <a:fillRect/>
+            </a:stretch>
+          </p:blipFill>
+          <p:spPr>
+            <a:xfrm>
+              <a:off x="559974" y="-325994"/>
+              <a:ext cx="6464152" cy="4709547"/>
+            </a:xfrm>
+            <a:prstGeom prst="rect">
+              <a:avLst/>
+            </a:prstGeom>
+          </p:spPr>
+        </p:pic>
+        <p:pic>
+          <p:nvPicPr>
+            <p:cNvPr id="66" name="Picture 65" descr="A map of the world&#10;&#10;AI-generated content may be incorrect.">
+              <a:extLst>
+                <a:ext uri="{FF2B5EF4-FFF2-40B4-BE49-F238E27FC236}">
+                  <a16:creationId xmlns:a16="http://schemas.microsoft.com/office/drawing/2014/main" id="{0053E0E0-4D60-42A6-73BB-CDB88CC6CCE9}"/>
+                </a:ext>
+              </a:extLst>
+            </p:cNvPr>
+            <p:cNvPicPr>
+              <a:picLocks noChangeAspect="1"/>
+            </p:cNvPicPr>
+            <p:nvPr/>
+          </p:nvPicPr>
+          <p:blipFill>
+            <a:blip r:embed="rId3">
+              <a:extLst>
+                <a:ext uri="{28A0092B-C50C-407E-A947-70E740481C1C}">
+                  <a14:useLocalDpi xmlns:a14="http://schemas.microsoft.com/office/drawing/2010/main" val="0"/>
+                </a:ext>
+              </a:extLst>
+            </a:blip>
+            <a:srcRect t="5199"/>
+            <a:stretch>
+              <a:fillRect/>
+            </a:stretch>
+          </p:blipFill>
+          <p:spPr>
+            <a:xfrm>
+              <a:off x="452024" y="4383553"/>
+              <a:ext cx="6639558" cy="3328381"/>
+            </a:xfrm>
+            <a:prstGeom prst="rect">
+              <a:avLst/>
+            </a:prstGeom>
+          </p:spPr>
+        </p:pic>
+        <p:sp>
+          <p:nvSpPr>
+            <p:cNvPr id="67" name="Rectangle 66">
+              <a:extLst>
+                <a:ext uri="{FF2B5EF4-FFF2-40B4-BE49-F238E27FC236}">
+                  <a16:creationId xmlns:a16="http://schemas.microsoft.com/office/drawing/2014/main" id="{B455C9BD-44BC-993E-C8B9-62A170FA4528}"/>
+                </a:ext>
+              </a:extLst>
+            </p:cNvPr>
+            <p:cNvSpPr/>
+            <p:nvPr/>
+          </p:nvSpPr>
+          <p:spPr>
+            <a:xfrm>
+              <a:off x="514254" y="4784114"/>
+              <a:ext cx="91440" cy="1671359"/>
+            </a:xfrm>
+            <a:prstGeom prst="rect">
+              <a:avLst/>
+            </a:prstGeom>
+            <a:solidFill>
+              <a:schemeClr val="bg1">
+                <a:lumMod val="50000"/>
+              </a:schemeClr>
+            </a:solidFill>
+            <a:ln>
+              <a:noFill/>
+            </a:ln>
+          </p:spPr>
+          <p:style>
+            <a:lnRef idx="2">
+              <a:schemeClr val="accent1">
+                <a:shade val="15000"/>
+              </a:schemeClr>
+            </a:lnRef>
+            <a:fillRef idx="1">
+              <a:schemeClr val="accent1"/>
+            </a:fillRef>
+            <a:effectRef idx="0">
+              <a:schemeClr val="accent1"/>
+            </a:effectRef>
+            <a:fontRef idx="minor">
+              <a:schemeClr val="lt1"/>
+            </a:fontRef>
+          </p:style>
+          <p:txBody>
+            <a:bodyPr rtlCol="0" anchor="ctr"/>
+            <a:lstStyle/>
+            <a:p>
+              <a:pPr algn="ctr"/>
+              <a:endParaRPr lang="en-US"/>
+            </a:p>
+          </p:txBody>
+        </p:sp>
+        <p:pic>
+          <p:nvPicPr>
+            <p:cNvPr id="46" name="Picture 45" descr="A close-up of a blue and red text&#10;&#10;AI-generated content may be incorrect.">
+              <a:extLst>
+                <a:ext uri="{FF2B5EF4-FFF2-40B4-BE49-F238E27FC236}">
+                  <a16:creationId xmlns:a16="http://schemas.microsoft.com/office/drawing/2014/main" id="{9A654223-BA52-9DB9-9DFB-EDEDFDA49493}"/>
+                </a:ext>
+              </a:extLst>
+            </p:cNvPr>
+            <p:cNvPicPr>
+              <a:picLocks noChangeAspect="1"/>
+            </p:cNvPicPr>
+            <p:nvPr/>
+          </p:nvPicPr>
+          <p:blipFill>
+            <a:blip r:embed="rId4">
+              <a:extLst>
+                <a:ext uri="{28A0092B-C50C-407E-A947-70E740481C1C}">
+                  <a14:useLocalDpi xmlns:a14="http://schemas.microsoft.com/office/drawing/2010/main" val="0"/>
+                </a:ext>
+              </a:extLst>
+            </a:blip>
+            <a:srcRect t="8064"/>
+            <a:stretch>
+              <a:fillRect/>
+            </a:stretch>
+          </p:blipFill>
+          <p:spPr>
+            <a:xfrm>
+              <a:off x="487583" y="7679132"/>
+              <a:ext cx="6603999" cy="2247601"/>
+            </a:xfrm>
+            <a:prstGeom prst="rect">
+              <a:avLst/>
+            </a:prstGeom>
+          </p:spPr>
+        </p:pic>
+        <p:sp>
+          <p:nvSpPr>
+            <p:cNvPr id="70" name="Rectangle 69">
+              <a:extLst>
+                <a:ext uri="{FF2B5EF4-FFF2-40B4-BE49-F238E27FC236}">
+                  <a16:creationId xmlns:a16="http://schemas.microsoft.com/office/drawing/2014/main" id="{DED0CBC7-5640-DBD2-EEA4-B2902237B651}"/>
+                </a:ext>
+              </a:extLst>
+            </p:cNvPr>
+            <p:cNvSpPr/>
+            <p:nvPr/>
+          </p:nvSpPr>
+          <p:spPr>
+            <a:xfrm>
+              <a:off x="636184" y="7864481"/>
+              <a:ext cx="91440" cy="680095"/>
+            </a:xfrm>
+            <a:prstGeom prst="rect">
+              <a:avLst/>
+            </a:prstGeom>
+            <a:solidFill>
+              <a:srgbClr val="E5243B"/>
+            </a:solidFill>
+            <a:ln>
+              <a:noFill/>
+            </a:ln>
+          </p:spPr>
+          <p:style>
+            <a:lnRef idx="2">
+              <a:schemeClr val="accent1">
+                <a:shade val="15000"/>
+              </a:schemeClr>
+            </a:lnRef>
+            <a:fillRef idx="1">
+              <a:schemeClr val="accent1"/>
+            </a:fillRef>
+            <a:effectRef idx="0">
+              <a:schemeClr val="accent1"/>
+            </a:effectRef>
+            <a:fontRef idx="minor">
+              <a:schemeClr val="lt1"/>
+            </a:fontRef>
+          </p:style>
+          <p:txBody>
+            <a:bodyPr rtlCol="0" anchor="ctr"/>
+            <a:lstStyle/>
+            <a:p>
+              <a:pPr algn="ctr"/>
+              <a:endParaRPr lang="en-US"/>
+            </a:p>
+          </p:txBody>
+        </p:sp>
+        <p:sp>
+          <p:nvSpPr>
+            <p:cNvPr id="19" name="Rectangle 18">
+              <a:extLst>
+                <a:ext uri="{FF2B5EF4-FFF2-40B4-BE49-F238E27FC236}">
+                  <a16:creationId xmlns:a16="http://schemas.microsoft.com/office/drawing/2014/main" id="{2FD602B3-168B-A9C2-6E32-9AD219E43660}"/>
+                </a:ext>
+              </a:extLst>
+            </p:cNvPr>
+            <p:cNvSpPr/>
+            <p:nvPr/>
+          </p:nvSpPr>
+          <p:spPr>
+            <a:xfrm>
+              <a:off x="516164" y="7864481"/>
+              <a:ext cx="91440" cy="1949862"/>
+            </a:xfrm>
+            <a:prstGeom prst="rect">
+              <a:avLst/>
+            </a:prstGeom>
+            <a:solidFill>
+              <a:schemeClr val="bg1">
+                <a:lumMod val="50000"/>
+              </a:schemeClr>
+            </a:solidFill>
+            <a:ln>
+              <a:noFill/>
+            </a:ln>
+          </p:spPr>
+          <p:style>
+            <a:lnRef idx="2">
+              <a:schemeClr val="accent1">
+                <a:shade val="15000"/>
+              </a:schemeClr>
+            </a:lnRef>
+            <a:fillRef idx="1">
+              <a:schemeClr val="accent1"/>
+            </a:fillRef>
+            <a:effectRef idx="0">
+              <a:schemeClr val="accent1"/>
+            </a:effectRef>
+            <a:fontRef idx="minor">
+              <a:schemeClr val="lt1"/>
+            </a:fontRef>
+          </p:style>
+          <p:txBody>
+            <a:bodyPr rtlCol="0" anchor="ctr"/>
+            <a:lstStyle/>
+            <a:p>
+              <a:pPr algn="ctr"/>
+              <a:endParaRPr lang="en-US"/>
+            </a:p>
+          </p:txBody>
+        </p:sp>
+        <p:sp>
+          <p:nvSpPr>
+            <p:cNvPr id="71" name="Rectangle 70">
+              <a:extLst>
+                <a:ext uri="{FF2B5EF4-FFF2-40B4-BE49-F238E27FC236}">
+                  <a16:creationId xmlns:a16="http://schemas.microsoft.com/office/drawing/2014/main" id="{F8922976-9000-9974-9AF7-BA7925D92AAB}"/>
+                </a:ext>
+              </a:extLst>
+            </p:cNvPr>
+            <p:cNvSpPr/>
+            <p:nvPr/>
+          </p:nvSpPr>
+          <p:spPr>
+            <a:xfrm>
+              <a:off x="636184" y="4784114"/>
+              <a:ext cx="91440" cy="1044250"/>
+            </a:xfrm>
+            <a:prstGeom prst="rect">
+              <a:avLst/>
+            </a:prstGeom>
+            <a:solidFill>
+              <a:srgbClr val="E5243B"/>
+            </a:solidFill>
+            <a:ln>
+              <a:noFill/>
+            </a:ln>
+          </p:spPr>
+          <p:style>
+            <a:lnRef idx="2">
+              <a:schemeClr val="accent1">
+                <a:shade val="15000"/>
+              </a:schemeClr>
+            </a:lnRef>
+            <a:fillRef idx="1">
+              <a:schemeClr val="accent1"/>
+            </a:fillRef>
+            <a:effectRef idx="0">
+              <a:schemeClr val="accent1"/>
+            </a:effectRef>
+            <a:fontRef idx="minor">
+              <a:schemeClr val="lt1"/>
+            </a:fontRef>
+          </p:style>
+          <p:txBody>
+            <a:bodyPr rtlCol="0" anchor="ctr"/>
+            <a:lstStyle/>
+            <a:p>
+              <a:pPr algn="ctr"/>
+              <a:endParaRPr lang="en-US"/>
+            </a:p>
+          </p:txBody>
+        </p:sp>
+        <p:sp>
+          <p:nvSpPr>
+            <p:cNvPr id="72" name="Rectangle 71">
+              <a:extLst>
+                <a:ext uri="{FF2B5EF4-FFF2-40B4-BE49-F238E27FC236}">
+                  <a16:creationId xmlns:a16="http://schemas.microsoft.com/office/drawing/2014/main" id="{412C6F05-E107-3038-96FC-CE6A4594403F}"/>
+                </a:ext>
+              </a:extLst>
+            </p:cNvPr>
+            <p:cNvSpPr/>
+            <p:nvPr/>
+          </p:nvSpPr>
+          <p:spPr>
+            <a:xfrm>
+              <a:off x="612043" y="768368"/>
+              <a:ext cx="91440" cy="1527048"/>
+            </a:xfrm>
+            <a:prstGeom prst="rect">
+              <a:avLst/>
+            </a:prstGeom>
+            <a:solidFill>
+              <a:srgbClr val="E5243B"/>
+            </a:solidFill>
+            <a:ln>
+              <a:noFill/>
+            </a:ln>
+          </p:spPr>
+          <p:style>
+            <a:lnRef idx="2">
+              <a:schemeClr val="accent1">
+                <a:shade val="15000"/>
+              </a:schemeClr>
+            </a:lnRef>
+            <a:fillRef idx="1">
+              <a:schemeClr val="accent1"/>
+            </a:fillRef>
+            <a:effectRef idx="0">
+              <a:schemeClr val="accent1"/>
+            </a:effectRef>
+            <a:fontRef idx="minor">
+              <a:schemeClr val="lt1"/>
+            </a:fontRef>
+          </p:style>
+          <p:txBody>
+            <a:bodyPr rtlCol="0" anchor="ctr"/>
+            <a:lstStyle/>
+            <a:p>
+              <a:pPr algn="ctr"/>
+              <a:endParaRPr lang="en-US"/>
+            </a:p>
+          </p:txBody>
+        </p:sp>
+        <p:sp>
+          <p:nvSpPr>
+            <p:cNvPr id="14" name="Rectangle 13">
+              <a:extLst>
+                <a:ext uri="{FF2B5EF4-FFF2-40B4-BE49-F238E27FC236}">
+                  <a16:creationId xmlns:a16="http://schemas.microsoft.com/office/drawing/2014/main" id="{FA36933E-B0E1-3900-0466-73B39E941941}"/>
+                </a:ext>
+              </a:extLst>
+            </p:cNvPr>
+            <p:cNvSpPr/>
+            <p:nvPr/>
+          </p:nvSpPr>
+          <p:spPr>
+            <a:xfrm>
+              <a:off x="494569" y="768368"/>
+              <a:ext cx="91440" cy="2609116"/>
+            </a:xfrm>
+            <a:prstGeom prst="rect">
+              <a:avLst/>
+            </a:prstGeom>
+            <a:solidFill>
+              <a:schemeClr val="bg1">
+                <a:lumMod val="50000"/>
+              </a:schemeClr>
+            </a:solidFill>
+            <a:ln>
+              <a:noFill/>
+            </a:ln>
+          </p:spPr>
+          <p:style>
+            <a:lnRef idx="2">
+              <a:schemeClr val="accent1">
+                <a:shade val="15000"/>
+              </a:schemeClr>
+            </a:lnRef>
+            <a:fillRef idx="1">
+              <a:schemeClr val="accent1"/>
+            </a:fillRef>
+            <a:effectRef idx="0">
+              <a:schemeClr val="accent1"/>
+            </a:effectRef>
+            <a:fontRef idx="minor">
+              <a:schemeClr val="lt1"/>
+            </a:fontRef>
+          </p:style>
+          <p:txBody>
+            <a:bodyPr rtlCol="0" anchor="ctr"/>
+            <a:lstStyle/>
+            <a:p>
+              <a:pPr algn="ctr"/>
+              <a:endParaRPr lang="en-US" dirty="0"/>
+            </a:p>
+          </p:txBody>
+        </p:sp>
+        <p:sp>
+          <p:nvSpPr>
+            <p:cNvPr id="73" name="TextBox 72">
+              <a:extLst>
+                <a:ext uri="{FF2B5EF4-FFF2-40B4-BE49-F238E27FC236}">
+                  <a16:creationId xmlns:a16="http://schemas.microsoft.com/office/drawing/2014/main" id="{9F61512F-4C28-F6D8-06C9-CDDE480D84BF}"/>
+                </a:ext>
+              </a:extLst>
+            </p:cNvPr>
+            <p:cNvSpPr txBox="1"/>
+            <p:nvPr/>
+          </p:nvSpPr>
+          <p:spPr>
+            <a:xfrm>
+              <a:off x="19441" y="4468116"/>
+              <a:ext cx="338554" cy="369332"/>
+            </a:xfrm>
+            <a:prstGeom prst="rect">
+              <a:avLst/>
+            </a:prstGeom>
             <a:noFill/>
-          </a:ln>
-        </p:spPr>
-        <p:style>
-          <a:lnRef idx="2">
-            <a:schemeClr val="accent1">
-              <a:shade val="15000"/>
-            </a:schemeClr>
-          </a:lnRef>
-          <a:fillRef idx="1">
-            <a:schemeClr val="accent1"/>
-          </a:fillRef>
-          <a:effectRef idx="0">
-            <a:schemeClr val="accent1"/>
-          </a:effectRef>
-          <a:fontRef idx="minor">
-            <a:schemeClr val="lt1"/>
-          </a:fontRef>
-        </p:style>
-        <p:txBody>
-          <a:bodyPr rtlCol="0" anchor="ctr"/>
-          <a:lstStyle/>
-          <a:p>
-            <a:pPr algn="ctr"/>
-            <a:endParaRPr lang="en-US"/>
-          </a:p>
-        </p:txBody>
-      </p:sp>
-      <p:sp>
-        <p:nvSpPr>
-          <p:cNvPr id="19" name="Rectangle 18">
-            <a:extLst>
-              <a:ext uri="{FF2B5EF4-FFF2-40B4-BE49-F238E27FC236}">
-                <a16:creationId xmlns:a16="http://schemas.microsoft.com/office/drawing/2014/main" id="{2FD602B3-168B-A9C2-6E32-9AD219E43660}"/>
-              </a:ext>
-            </a:extLst>
-          </p:cNvPr>
-          <p:cNvSpPr/>
-          <p:nvPr/>
-        </p:nvSpPr>
-        <p:spPr>
-          <a:xfrm>
-            <a:off x="1805880" y="5517738"/>
-            <a:ext cx="148680" cy="1949862"/>
-          </a:xfrm>
-          <a:prstGeom prst="rect">
-            <a:avLst/>
-          </a:prstGeom>
-          <a:solidFill>
-            <a:schemeClr val="bg1">
-              <a:lumMod val="50000"/>
-            </a:schemeClr>
-          </a:solidFill>
-          <a:ln>
+          </p:spPr>
+          <p:txBody>
+            <a:bodyPr wrap="none" rtlCol="0">
+              <a:spAutoFit/>
+            </a:bodyPr>
+            <a:lstStyle/>
+            <a:p>
+              <a:r>
+                <a:rPr lang="en-US" dirty="0">
+                  <a:latin typeface="Arial" panose="020B0604020202020204" pitchFamily="34" charset="0"/>
+                  <a:cs typeface="Arial" panose="020B0604020202020204" pitchFamily="34" charset="0"/>
+                </a:rPr>
+                <a:t>B</a:t>
+              </a:r>
+            </a:p>
+          </p:txBody>
+        </p:sp>
+        <p:sp>
+          <p:nvSpPr>
+            <p:cNvPr id="74" name="TextBox 73">
+              <a:extLst>
+                <a:ext uri="{FF2B5EF4-FFF2-40B4-BE49-F238E27FC236}">
+                  <a16:creationId xmlns:a16="http://schemas.microsoft.com/office/drawing/2014/main" id="{C7D821B7-A670-FEF6-325B-E3656FC1A1E7}"/>
+                </a:ext>
+              </a:extLst>
+            </p:cNvPr>
+            <p:cNvSpPr txBox="1"/>
+            <p:nvPr/>
+          </p:nvSpPr>
+          <p:spPr>
+            <a:xfrm>
+              <a:off x="13029" y="7679132"/>
+              <a:ext cx="351378" cy="369332"/>
+            </a:xfrm>
+            <a:prstGeom prst="rect">
+              <a:avLst/>
+            </a:prstGeom>
             <a:noFill/>
-          </a:ln>
-        </p:spPr>
-        <p:style>
-          <a:lnRef idx="2">
-            <a:schemeClr val="accent1">
-              <a:shade val="15000"/>
-            </a:schemeClr>
-          </a:lnRef>
-          <a:fillRef idx="1">
-            <a:schemeClr val="accent1"/>
-          </a:fillRef>
-          <a:effectRef idx="0">
-            <a:schemeClr val="accent1"/>
-          </a:effectRef>
-          <a:fontRef idx="minor">
-            <a:schemeClr val="lt1"/>
-          </a:fontRef>
-        </p:style>
-        <p:txBody>
-          <a:bodyPr rtlCol="0" anchor="ctr"/>
-          <a:lstStyle/>
-          <a:p>
-            <a:pPr algn="ctr"/>
-            <a:endParaRPr lang="en-US"/>
-          </a:p>
-        </p:txBody>
-      </p:sp>
-      <p:sp>
-        <p:nvSpPr>
-          <p:cNvPr id="20" name="TextBox 19">
-            <a:extLst>
-              <a:ext uri="{FF2B5EF4-FFF2-40B4-BE49-F238E27FC236}">
-                <a16:creationId xmlns:a16="http://schemas.microsoft.com/office/drawing/2014/main" id="{8D1195AE-83FD-14A8-56BD-022E9EF726DE}"/>
-              </a:ext>
-            </a:extLst>
-          </p:cNvPr>
-          <p:cNvSpPr txBox="1"/>
-          <p:nvPr/>
-        </p:nvSpPr>
-        <p:spPr>
-          <a:xfrm>
-            <a:off x="1259697" y="88545"/>
-            <a:ext cx="320922" cy="369332"/>
-          </a:xfrm>
-          <a:prstGeom prst="rect">
-            <a:avLst/>
-          </a:prstGeom>
-          <a:noFill/>
-        </p:spPr>
-        <p:txBody>
-          <a:bodyPr wrap="none" rtlCol="0">
-            <a:spAutoFit/>
-          </a:bodyPr>
-          <a:lstStyle/>
-          <a:p>
-            <a:r>
-              <a:rPr lang="en-US" dirty="0"/>
-              <a:t>A</a:t>
-            </a:r>
-          </a:p>
-        </p:txBody>
-      </p:sp>
-      <p:sp>
-        <p:nvSpPr>
-          <p:cNvPr id="21" name="TextBox 20">
-            <a:extLst>
-              <a:ext uri="{FF2B5EF4-FFF2-40B4-BE49-F238E27FC236}">
-                <a16:creationId xmlns:a16="http://schemas.microsoft.com/office/drawing/2014/main" id="{2CC6E9FD-1BCF-F001-8DBE-9247D46D440E}"/>
-              </a:ext>
-            </a:extLst>
-          </p:cNvPr>
-          <p:cNvSpPr txBox="1"/>
-          <p:nvPr/>
-        </p:nvSpPr>
-        <p:spPr>
-          <a:xfrm>
-            <a:off x="1265516" y="2970872"/>
-            <a:ext cx="324128" cy="369332"/>
-          </a:xfrm>
-          <a:prstGeom prst="rect">
-            <a:avLst/>
-          </a:prstGeom>
-          <a:noFill/>
-        </p:spPr>
-        <p:txBody>
-          <a:bodyPr wrap="none" rtlCol="0">
-            <a:spAutoFit/>
-          </a:bodyPr>
-          <a:lstStyle/>
-          <a:p>
-            <a:r>
-              <a:rPr lang="en-US" dirty="0"/>
-              <a:t>B</a:t>
-            </a:r>
-          </a:p>
-        </p:txBody>
-      </p:sp>
-      <p:sp>
-        <p:nvSpPr>
-          <p:cNvPr id="22" name="TextBox 21">
-            <a:extLst>
-              <a:ext uri="{FF2B5EF4-FFF2-40B4-BE49-F238E27FC236}">
-                <a16:creationId xmlns:a16="http://schemas.microsoft.com/office/drawing/2014/main" id="{FAF3E675-8EF8-5798-0CF2-D40C3B51DB5B}"/>
-              </a:ext>
-            </a:extLst>
-          </p:cNvPr>
-          <p:cNvSpPr txBox="1"/>
-          <p:nvPr/>
-        </p:nvSpPr>
-        <p:spPr>
-          <a:xfrm>
-            <a:off x="1265516" y="5340483"/>
-            <a:ext cx="344966" cy="369332"/>
-          </a:xfrm>
-          <a:prstGeom prst="rect">
-            <a:avLst/>
-          </a:prstGeom>
-          <a:noFill/>
-        </p:spPr>
-        <p:txBody>
-          <a:bodyPr wrap="none" rtlCol="0">
-            <a:spAutoFit/>
-          </a:bodyPr>
-          <a:lstStyle/>
-          <a:p>
-            <a:r>
-              <a:rPr lang="en-US" dirty="0"/>
-              <a:t>C</a:t>
-            </a:r>
-          </a:p>
-        </p:txBody>
-      </p:sp>
-      <p:sp>
-        <p:nvSpPr>
-          <p:cNvPr id="23" name="Rectangle 22">
-            <a:extLst>
-              <a:ext uri="{FF2B5EF4-FFF2-40B4-BE49-F238E27FC236}">
-                <a16:creationId xmlns:a16="http://schemas.microsoft.com/office/drawing/2014/main" id="{35805BB0-ABE7-FA99-7821-C333D9E4D10D}"/>
-              </a:ext>
-            </a:extLst>
-          </p:cNvPr>
-          <p:cNvSpPr/>
-          <p:nvPr/>
-        </p:nvSpPr>
-        <p:spPr>
-          <a:xfrm>
-            <a:off x="408880" y="7649805"/>
-            <a:ext cx="216000" cy="216000"/>
-          </a:xfrm>
-          <a:prstGeom prst="rect">
-            <a:avLst/>
-          </a:prstGeom>
-          <a:solidFill>
-            <a:schemeClr val="bg1">
-              <a:lumMod val="50000"/>
-            </a:schemeClr>
-          </a:solidFill>
-          <a:ln>
-            <a:noFill/>
-          </a:ln>
-        </p:spPr>
-        <p:style>
-          <a:lnRef idx="2">
-            <a:schemeClr val="accent1">
-              <a:shade val="15000"/>
-            </a:schemeClr>
-          </a:lnRef>
-          <a:fillRef idx="1">
-            <a:schemeClr val="accent1"/>
-          </a:fillRef>
-          <a:effectRef idx="0">
-            <a:schemeClr val="accent1"/>
-          </a:effectRef>
-          <a:fontRef idx="minor">
-            <a:schemeClr val="lt1"/>
-          </a:fontRef>
-        </p:style>
-        <p:txBody>
-          <a:bodyPr rtlCol="0" anchor="ctr"/>
-          <a:lstStyle/>
-          <a:p>
-            <a:pPr algn="ctr"/>
-            <a:endParaRPr lang="en-US"/>
-          </a:p>
-        </p:txBody>
-      </p:sp>
-      <p:sp>
-        <p:nvSpPr>
-          <p:cNvPr id="24" name="Rectangle 23">
-            <a:extLst>
-              <a:ext uri="{FF2B5EF4-FFF2-40B4-BE49-F238E27FC236}">
-                <a16:creationId xmlns:a16="http://schemas.microsoft.com/office/drawing/2014/main" id="{F991E1B7-056F-C162-148E-C403668E8209}"/>
-              </a:ext>
-            </a:extLst>
-          </p:cNvPr>
-          <p:cNvSpPr/>
-          <p:nvPr/>
-        </p:nvSpPr>
-        <p:spPr>
-          <a:xfrm>
-            <a:off x="408880" y="7951906"/>
-            <a:ext cx="216000" cy="216000"/>
-          </a:xfrm>
-          <a:prstGeom prst="rect">
-            <a:avLst/>
-          </a:prstGeom>
-          <a:solidFill>
-            <a:srgbClr val="E5243B"/>
-          </a:solidFill>
-          <a:ln>
-            <a:noFill/>
-          </a:ln>
-        </p:spPr>
-        <p:style>
-          <a:lnRef idx="2">
-            <a:schemeClr val="accent1">
-              <a:shade val="15000"/>
-            </a:schemeClr>
-          </a:lnRef>
-          <a:fillRef idx="1">
-            <a:schemeClr val="accent1"/>
-          </a:fillRef>
-          <a:effectRef idx="0">
-            <a:schemeClr val="accent1"/>
-          </a:effectRef>
-          <a:fontRef idx="minor">
-            <a:schemeClr val="lt1"/>
-          </a:fontRef>
-        </p:style>
-        <p:txBody>
-          <a:bodyPr rtlCol="0" anchor="ctr"/>
-          <a:lstStyle/>
-          <a:p>
-            <a:pPr algn="ctr"/>
-            <a:endParaRPr lang="en-US"/>
-          </a:p>
-        </p:txBody>
-      </p:sp>
-      <p:sp>
-        <p:nvSpPr>
-          <p:cNvPr id="26" name="Rectangle 25">
-            <a:extLst>
-              <a:ext uri="{FF2B5EF4-FFF2-40B4-BE49-F238E27FC236}">
-                <a16:creationId xmlns:a16="http://schemas.microsoft.com/office/drawing/2014/main" id="{30581DAC-3F7C-BF52-6904-E00725549857}"/>
-              </a:ext>
-            </a:extLst>
-          </p:cNvPr>
-          <p:cNvSpPr/>
-          <p:nvPr/>
-        </p:nvSpPr>
-        <p:spPr>
-          <a:xfrm>
-            <a:off x="408880" y="8321458"/>
-            <a:ext cx="216000" cy="216000"/>
-          </a:xfrm>
-          <a:prstGeom prst="rect">
-            <a:avLst/>
-          </a:prstGeom>
-          <a:solidFill>
-            <a:srgbClr val="A21942"/>
-          </a:solidFill>
-          <a:ln>
-            <a:noFill/>
-          </a:ln>
-        </p:spPr>
-        <p:style>
-          <a:lnRef idx="2">
-            <a:schemeClr val="accent1">
-              <a:shade val="15000"/>
-            </a:schemeClr>
-          </a:lnRef>
-          <a:fillRef idx="1">
-            <a:schemeClr val="accent1"/>
-          </a:fillRef>
-          <a:effectRef idx="0">
-            <a:schemeClr val="accent1"/>
-          </a:effectRef>
-          <a:fontRef idx="minor">
-            <a:schemeClr val="lt1"/>
-          </a:fontRef>
-        </p:style>
-        <p:txBody>
-          <a:bodyPr rtlCol="0" anchor="ctr"/>
-          <a:lstStyle/>
-          <a:p>
-            <a:pPr algn="ctr"/>
-            <a:endParaRPr lang="en-US"/>
-          </a:p>
-        </p:txBody>
-      </p:sp>
-      <p:sp>
-        <p:nvSpPr>
-          <p:cNvPr id="27" name="Rectangle 26">
-            <a:extLst>
-              <a:ext uri="{FF2B5EF4-FFF2-40B4-BE49-F238E27FC236}">
-                <a16:creationId xmlns:a16="http://schemas.microsoft.com/office/drawing/2014/main" id="{03C29CE9-5061-276A-A0D4-C0ABA7448BCA}"/>
-              </a:ext>
-            </a:extLst>
-          </p:cNvPr>
-          <p:cNvSpPr/>
-          <p:nvPr/>
-        </p:nvSpPr>
-        <p:spPr>
-          <a:xfrm>
-            <a:off x="408880" y="8733760"/>
-            <a:ext cx="216000" cy="216000"/>
-          </a:xfrm>
-          <a:prstGeom prst="rect">
-            <a:avLst/>
-          </a:prstGeom>
-          <a:solidFill>
-            <a:srgbClr val="B7D8ED"/>
-          </a:solidFill>
-          <a:ln>
-            <a:noFill/>
-          </a:ln>
-        </p:spPr>
-        <p:style>
-          <a:lnRef idx="2">
-            <a:schemeClr val="accent1">
-              <a:shade val="15000"/>
-            </a:schemeClr>
-          </a:lnRef>
-          <a:fillRef idx="1">
-            <a:schemeClr val="accent1"/>
-          </a:fillRef>
-          <a:effectRef idx="0">
-            <a:schemeClr val="accent1"/>
-          </a:effectRef>
-          <a:fontRef idx="minor">
-            <a:schemeClr val="lt1"/>
-          </a:fontRef>
-        </p:style>
-        <p:txBody>
-          <a:bodyPr rtlCol="0" anchor="ctr"/>
-          <a:lstStyle/>
-          <a:p>
-            <a:pPr algn="ctr"/>
-            <a:endParaRPr lang="en-US"/>
-          </a:p>
-        </p:txBody>
-      </p:sp>
-      <p:sp>
-        <p:nvSpPr>
-          <p:cNvPr id="28" name="Rectangle 27">
-            <a:extLst>
-              <a:ext uri="{FF2B5EF4-FFF2-40B4-BE49-F238E27FC236}">
-                <a16:creationId xmlns:a16="http://schemas.microsoft.com/office/drawing/2014/main" id="{A6BD25BE-9749-46B4-BE23-2C94A7FB3E94}"/>
-              </a:ext>
-            </a:extLst>
-          </p:cNvPr>
-          <p:cNvSpPr/>
-          <p:nvPr/>
-        </p:nvSpPr>
-        <p:spPr>
-          <a:xfrm>
-            <a:off x="408880" y="9160311"/>
-            <a:ext cx="216000" cy="216000"/>
-          </a:xfrm>
-          <a:prstGeom prst="rect">
-            <a:avLst/>
-          </a:prstGeom>
-          <a:solidFill>
-            <a:srgbClr val="21507E"/>
-          </a:solidFill>
-          <a:ln>
-            <a:noFill/>
-          </a:ln>
-        </p:spPr>
-        <p:style>
-          <a:lnRef idx="2">
-            <a:schemeClr val="accent1">
-              <a:shade val="15000"/>
-            </a:schemeClr>
-          </a:lnRef>
-          <a:fillRef idx="1">
-            <a:schemeClr val="accent1"/>
-          </a:fillRef>
-          <a:effectRef idx="0">
-            <a:schemeClr val="accent1"/>
-          </a:effectRef>
-          <a:fontRef idx="minor">
-            <a:schemeClr val="lt1"/>
-          </a:fontRef>
-        </p:style>
-        <p:txBody>
-          <a:bodyPr rtlCol="0" anchor="ctr"/>
-          <a:lstStyle/>
-          <a:p>
-            <a:pPr algn="ctr"/>
-            <a:endParaRPr lang="en-US"/>
-          </a:p>
-        </p:txBody>
-      </p:sp>
-      <p:sp>
-        <p:nvSpPr>
-          <p:cNvPr id="29" name="Rectangle 28">
-            <a:extLst>
-              <a:ext uri="{FF2B5EF4-FFF2-40B4-BE49-F238E27FC236}">
-                <a16:creationId xmlns:a16="http://schemas.microsoft.com/office/drawing/2014/main" id="{4F7874FA-1E27-FFDA-C744-2C8CCF671A78}"/>
-              </a:ext>
-            </a:extLst>
-          </p:cNvPr>
-          <p:cNvSpPr/>
-          <p:nvPr/>
-        </p:nvSpPr>
-        <p:spPr>
-          <a:xfrm>
-            <a:off x="408880" y="9567006"/>
-            <a:ext cx="216000" cy="216000"/>
-          </a:xfrm>
-          <a:prstGeom prst="rect">
-            <a:avLst/>
-          </a:prstGeom>
-          <a:solidFill>
-            <a:srgbClr val="DDA63A"/>
-          </a:solidFill>
-          <a:ln>
-            <a:noFill/>
-          </a:ln>
-        </p:spPr>
-        <p:style>
-          <a:lnRef idx="2">
-            <a:schemeClr val="accent1">
-              <a:shade val="15000"/>
-            </a:schemeClr>
-          </a:lnRef>
-          <a:fillRef idx="1">
-            <a:schemeClr val="accent1"/>
-          </a:fillRef>
-          <a:effectRef idx="0">
-            <a:schemeClr val="accent1"/>
-          </a:effectRef>
-          <a:fontRef idx="minor">
-            <a:schemeClr val="lt1"/>
-          </a:fontRef>
-        </p:style>
-        <p:txBody>
-          <a:bodyPr rtlCol="0" anchor="ctr"/>
-          <a:lstStyle/>
-          <a:p>
-            <a:pPr algn="ctr"/>
-            <a:endParaRPr lang="en-US"/>
-          </a:p>
-        </p:txBody>
-      </p:sp>
-      <p:sp>
-        <p:nvSpPr>
-          <p:cNvPr id="30" name="TextBox 29">
-            <a:extLst>
-              <a:ext uri="{FF2B5EF4-FFF2-40B4-BE49-F238E27FC236}">
-                <a16:creationId xmlns:a16="http://schemas.microsoft.com/office/drawing/2014/main" id="{570E5B45-3AEB-1581-FF89-B2824E585CDA}"/>
-              </a:ext>
-            </a:extLst>
-          </p:cNvPr>
-          <p:cNvSpPr txBox="1"/>
-          <p:nvPr/>
-        </p:nvSpPr>
-        <p:spPr>
-          <a:xfrm>
-            <a:off x="624880" y="7608286"/>
-            <a:ext cx="4595169" cy="276999"/>
-          </a:xfrm>
-          <a:prstGeom prst="rect">
-            <a:avLst/>
-          </a:prstGeom>
-          <a:noFill/>
-        </p:spPr>
-        <p:txBody>
-          <a:bodyPr wrap="none" rtlCol="0">
-            <a:spAutoFit/>
-          </a:bodyPr>
-          <a:lstStyle/>
-          <a:p>
-            <a:r>
-              <a:rPr lang="en-US" sz="1200" dirty="0"/>
-              <a:t>Quantity of deforestation linked to commodities consumed locally</a:t>
-            </a:r>
-          </a:p>
-        </p:txBody>
-      </p:sp>
-      <p:sp>
-        <p:nvSpPr>
-          <p:cNvPr id="31" name="TextBox 30">
-            <a:extLst>
-              <a:ext uri="{FF2B5EF4-FFF2-40B4-BE49-F238E27FC236}">
-                <a16:creationId xmlns:a16="http://schemas.microsoft.com/office/drawing/2014/main" id="{0D187F1F-E814-EAC5-3016-FF2045C36C1B}"/>
-              </a:ext>
-            </a:extLst>
-          </p:cNvPr>
-          <p:cNvSpPr txBox="1"/>
-          <p:nvPr/>
-        </p:nvSpPr>
-        <p:spPr>
-          <a:xfrm>
-            <a:off x="624880" y="7883088"/>
-            <a:ext cx="4781950" cy="276999"/>
-          </a:xfrm>
-          <a:prstGeom prst="rect">
-            <a:avLst/>
-          </a:prstGeom>
-          <a:noFill/>
-        </p:spPr>
-        <p:txBody>
-          <a:bodyPr wrap="none" rtlCol="0">
-            <a:spAutoFit/>
-          </a:bodyPr>
-          <a:lstStyle/>
-          <a:p>
-            <a:r>
-              <a:rPr lang="en-US" sz="1200" dirty="0"/>
-              <a:t>Quantity of deforestation linked to commodities not consumed locally</a:t>
-            </a:r>
-          </a:p>
-        </p:txBody>
-      </p:sp>
-      <p:sp>
-        <p:nvSpPr>
-          <p:cNvPr id="33" name="TextBox 32">
-            <a:extLst>
-              <a:ext uri="{FF2B5EF4-FFF2-40B4-BE49-F238E27FC236}">
-                <a16:creationId xmlns:a16="http://schemas.microsoft.com/office/drawing/2014/main" id="{EB345525-235F-04C0-FFF1-FFFE7B4A913D}"/>
-              </a:ext>
-            </a:extLst>
-          </p:cNvPr>
-          <p:cNvSpPr txBox="1"/>
-          <p:nvPr/>
-        </p:nvSpPr>
-        <p:spPr>
-          <a:xfrm>
-            <a:off x="624880" y="8157890"/>
-            <a:ext cx="5645392" cy="461665"/>
-          </a:xfrm>
-          <a:prstGeom prst="rect">
-            <a:avLst/>
-          </a:prstGeom>
-          <a:noFill/>
-        </p:spPr>
-        <p:txBody>
-          <a:bodyPr wrap="none" rtlCol="0">
-            <a:spAutoFit/>
-          </a:bodyPr>
-          <a:lstStyle/>
-          <a:p>
-            <a:r>
-              <a:rPr lang="en-US" sz="1200" dirty="0"/>
-              <a:t>Total amount of deforestation embodied in commodities arriving in a specific area, </a:t>
-            </a:r>
-          </a:p>
-          <a:p>
-            <a:r>
-              <a:rPr lang="en-US" sz="1200" dirty="0"/>
-              <a:t>accounting for both direct consumption and goods that are re-exported.</a:t>
-            </a:r>
-          </a:p>
-        </p:txBody>
-      </p:sp>
-      <p:sp>
-        <p:nvSpPr>
-          <p:cNvPr id="34" name="TextBox 33">
-            <a:extLst>
-              <a:ext uri="{FF2B5EF4-FFF2-40B4-BE49-F238E27FC236}">
-                <a16:creationId xmlns:a16="http://schemas.microsoft.com/office/drawing/2014/main" id="{5CB1A8F8-6679-39B5-7D65-C726B4ED8D74}"/>
-              </a:ext>
-            </a:extLst>
-          </p:cNvPr>
-          <p:cNvSpPr txBox="1"/>
-          <p:nvPr/>
-        </p:nvSpPr>
-        <p:spPr>
-          <a:xfrm>
-            <a:off x="624880" y="8617358"/>
-            <a:ext cx="5169364" cy="461665"/>
-          </a:xfrm>
-          <a:prstGeom prst="rect">
-            <a:avLst/>
-          </a:prstGeom>
-          <a:noFill/>
-        </p:spPr>
-        <p:txBody>
-          <a:bodyPr wrap="none" rtlCol="0">
-            <a:spAutoFit/>
-          </a:bodyPr>
-          <a:lstStyle/>
-          <a:p>
-            <a:r>
-              <a:rPr lang="en-US" sz="1200" dirty="0"/>
-              <a:t>Direct consumption (commodities exported from the deforestation country </a:t>
-            </a:r>
-          </a:p>
-          <a:p>
-            <a:r>
-              <a:rPr lang="en-US" sz="1200" dirty="0"/>
-              <a:t>to a final consuming country).</a:t>
-            </a:r>
-          </a:p>
-        </p:txBody>
-      </p:sp>
-      <p:sp>
-        <p:nvSpPr>
-          <p:cNvPr id="35" name="TextBox 34">
-            <a:extLst>
-              <a:ext uri="{FF2B5EF4-FFF2-40B4-BE49-F238E27FC236}">
-                <a16:creationId xmlns:a16="http://schemas.microsoft.com/office/drawing/2014/main" id="{AB593A94-18B9-6A91-0162-19773D731D9B}"/>
-              </a:ext>
-            </a:extLst>
-          </p:cNvPr>
-          <p:cNvSpPr txBox="1"/>
-          <p:nvPr/>
-        </p:nvSpPr>
-        <p:spPr>
-          <a:xfrm>
-            <a:off x="624880" y="9076826"/>
-            <a:ext cx="5349093" cy="461665"/>
-          </a:xfrm>
-          <a:prstGeom prst="rect">
-            <a:avLst/>
-          </a:prstGeom>
-          <a:noFill/>
-        </p:spPr>
-        <p:txBody>
-          <a:bodyPr wrap="none" rtlCol="0">
-            <a:spAutoFit/>
-          </a:bodyPr>
-          <a:lstStyle/>
-          <a:p>
-            <a:r>
-              <a:rPr lang="en-US" sz="1200" dirty="0"/>
-              <a:t>Indirect consumption (commodities first exported to a country for processing, </a:t>
-            </a:r>
-          </a:p>
-          <a:p>
-            <a:r>
-              <a:rPr lang="en-US" sz="1200" dirty="0"/>
-              <a:t>then re-exported and consumed in a third country).</a:t>
-            </a:r>
-          </a:p>
-        </p:txBody>
-      </p:sp>
-      <p:sp>
-        <p:nvSpPr>
-          <p:cNvPr id="36" name="TextBox 35">
-            <a:extLst>
-              <a:ext uri="{FF2B5EF4-FFF2-40B4-BE49-F238E27FC236}">
-                <a16:creationId xmlns:a16="http://schemas.microsoft.com/office/drawing/2014/main" id="{F395F64D-3387-0D62-F194-A86BEDC31189}"/>
-              </a:ext>
-            </a:extLst>
-          </p:cNvPr>
-          <p:cNvSpPr txBox="1"/>
-          <p:nvPr/>
-        </p:nvSpPr>
-        <p:spPr>
-          <a:xfrm>
-            <a:off x="624880" y="9536294"/>
-            <a:ext cx="5380512" cy="276999"/>
-          </a:xfrm>
-          <a:prstGeom prst="rect">
-            <a:avLst/>
-          </a:prstGeom>
-          <a:noFill/>
-        </p:spPr>
-        <p:txBody>
-          <a:bodyPr wrap="none" rtlCol="0">
-            <a:spAutoFit/>
-          </a:bodyPr>
-          <a:lstStyle/>
-          <a:p>
-            <a:r>
-              <a:rPr lang="en-US" sz="1200" dirty="0"/>
-              <a:t>Total deforestation embodied in commodities consumed in the respective area</a:t>
-            </a:r>
-          </a:p>
-        </p:txBody>
-      </p:sp>
+          </p:spPr>
+          <p:txBody>
+            <a:bodyPr wrap="none" rtlCol="0">
+              <a:spAutoFit/>
+            </a:bodyPr>
+            <a:lstStyle/>
+            <a:p>
+              <a:r>
+                <a:rPr lang="en-US" dirty="0">
+                  <a:latin typeface="Arial" panose="020B0604020202020204" pitchFamily="34" charset="0"/>
+                  <a:cs typeface="Arial" panose="020B0604020202020204" pitchFamily="34" charset="0"/>
+                </a:rPr>
+                <a:t>C</a:t>
+              </a:r>
+            </a:p>
+          </p:txBody>
+        </p:sp>
+        <p:cxnSp>
+          <p:nvCxnSpPr>
+            <p:cNvPr id="76" name="Straight Connector 75">
+              <a:extLst>
+                <a:ext uri="{FF2B5EF4-FFF2-40B4-BE49-F238E27FC236}">
+                  <a16:creationId xmlns:a16="http://schemas.microsoft.com/office/drawing/2014/main" id="{28DC725B-0F4A-FDBB-5E01-C6029901C93F}"/>
+                </a:ext>
+              </a:extLst>
+            </p:cNvPr>
+            <p:cNvCxnSpPr>
+              <a:cxnSpLocks/>
+            </p:cNvCxnSpPr>
+            <p:nvPr/>
+          </p:nvCxnSpPr>
+          <p:spPr>
+            <a:xfrm>
+              <a:off x="195130" y="4375086"/>
+              <a:ext cx="6828996" cy="0"/>
+            </a:xfrm>
+            <a:prstGeom prst="line">
+              <a:avLst/>
+            </a:prstGeom>
+            <a:ln w="9525"/>
+          </p:spPr>
+          <p:style>
+            <a:lnRef idx="2">
+              <a:schemeClr val="dk1"/>
+            </a:lnRef>
+            <a:fillRef idx="0">
+              <a:schemeClr val="dk1"/>
+            </a:fillRef>
+            <a:effectRef idx="1">
+              <a:schemeClr val="dk1"/>
+            </a:effectRef>
+            <a:fontRef idx="minor">
+              <a:schemeClr val="tx1"/>
+            </a:fontRef>
+          </p:style>
+        </p:cxnSp>
+        <p:cxnSp>
+          <p:nvCxnSpPr>
+            <p:cNvPr id="78" name="Straight Connector 77">
+              <a:extLst>
+                <a:ext uri="{FF2B5EF4-FFF2-40B4-BE49-F238E27FC236}">
+                  <a16:creationId xmlns:a16="http://schemas.microsoft.com/office/drawing/2014/main" id="{7CBFDC97-F97B-B14D-1246-CACC10DB91B2}"/>
+                </a:ext>
+              </a:extLst>
+            </p:cNvPr>
+            <p:cNvCxnSpPr>
+              <a:cxnSpLocks/>
+            </p:cNvCxnSpPr>
+            <p:nvPr/>
+          </p:nvCxnSpPr>
+          <p:spPr>
+            <a:xfrm>
+              <a:off x="245652" y="7632470"/>
+              <a:ext cx="6828996" cy="0"/>
+            </a:xfrm>
+            <a:prstGeom prst="line">
+              <a:avLst/>
+            </a:prstGeom>
+            <a:ln w="9525"/>
+          </p:spPr>
+          <p:style>
+            <a:lnRef idx="2">
+              <a:schemeClr val="dk1"/>
+            </a:lnRef>
+            <a:fillRef idx="0">
+              <a:schemeClr val="dk1"/>
+            </a:fillRef>
+            <a:effectRef idx="1">
+              <a:schemeClr val="dk1"/>
+            </a:effectRef>
+            <a:fontRef idx="minor">
+              <a:schemeClr val="tx1"/>
+            </a:fontRef>
+          </p:style>
+        </p:cxnSp>
+      </p:grpSp>
     </p:spTree>
     <p:extLst>
       <p:ext uri="{BB962C8B-B14F-4D97-AF65-F5344CB8AC3E}">
